--- a/T cell decay slopes.pptx
+++ b/T cell decay slopes.pptx
@@ -5,20 +5,21 @@
     <p:sldMasterId id="2147483648" r:id="rId1"/>
   </p:sldMasterIdLst>
   <p:sldIdLst>
-    <p:sldId id="257" r:id="rId2"/>
-    <p:sldId id="271" r:id="rId3"/>
-    <p:sldId id="267" r:id="rId4"/>
-    <p:sldId id="258" r:id="rId5"/>
-    <p:sldId id="266" r:id="rId6"/>
-    <p:sldId id="268" r:id="rId7"/>
-    <p:sldId id="269" r:id="rId8"/>
-    <p:sldId id="272" r:id="rId9"/>
-    <p:sldId id="273" r:id="rId10"/>
-    <p:sldId id="274" r:id="rId11"/>
-    <p:sldId id="275" r:id="rId12"/>
-    <p:sldId id="278" r:id="rId13"/>
-    <p:sldId id="276" r:id="rId14"/>
-    <p:sldId id="277" r:id="rId15"/>
+    <p:sldId id="279" r:id="rId2"/>
+    <p:sldId id="257" r:id="rId3"/>
+    <p:sldId id="271" r:id="rId4"/>
+    <p:sldId id="267" r:id="rId5"/>
+    <p:sldId id="258" r:id="rId6"/>
+    <p:sldId id="266" r:id="rId7"/>
+    <p:sldId id="268" r:id="rId8"/>
+    <p:sldId id="269" r:id="rId9"/>
+    <p:sldId id="272" r:id="rId10"/>
+    <p:sldId id="273" r:id="rId11"/>
+    <p:sldId id="274" r:id="rId12"/>
+    <p:sldId id="275" r:id="rId13"/>
+    <p:sldId id="278" r:id="rId14"/>
+    <p:sldId id="276" r:id="rId15"/>
+    <p:sldId id="277" r:id="rId16"/>
   </p:sldIdLst>
   <p:sldSz cx="12192000" cy="6858000"/>
   <p:notesSz cx="6858000" cy="9144000"/>
@@ -117,6 +118,11 @@
       </a:defRPr>
     </a:lvl9pPr>
   </p:defaultTextStyle>
+  <p:extLst>
+    <p:ext uri="{EFAFB233-063F-42B5-8137-9DF3F51BA10A}">
+      <p15:sldGuideLst xmlns:p15="http://schemas.microsoft.com/office/powerpoint/2012/main"/>
+    </p:ext>
+  </p:extLst>
 </p:presentation>
 </file>
 
@@ -269,7 +275,7 @@
           <a:p>
             <a:fld id="{B163C8C7-CBCA-4667-931A-6DAEBDCEF4E5}" type="datetimeFigureOut">
               <a:rPr lang="en-AU" smtClean="0"/>
-              <a:t>28/09/2026</a:t>
+              <a:t>12/10/2026</a:t>
             </a:fld>
             <a:endParaRPr lang="en-AU"/>
           </a:p>
@@ -469,7 +475,7 @@
           <a:p>
             <a:fld id="{B163C8C7-CBCA-4667-931A-6DAEBDCEF4E5}" type="datetimeFigureOut">
               <a:rPr lang="en-AU" smtClean="0"/>
-              <a:t>28/09/2026</a:t>
+              <a:t>12/10/2026</a:t>
             </a:fld>
             <a:endParaRPr lang="en-AU"/>
           </a:p>
@@ -679,7 +685,7 @@
           <a:p>
             <a:fld id="{B163C8C7-CBCA-4667-931A-6DAEBDCEF4E5}" type="datetimeFigureOut">
               <a:rPr lang="en-AU" smtClean="0"/>
-              <a:t>28/09/2026</a:t>
+              <a:t>12/10/2026</a:t>
             </a:fld>
             <a:endParaRPr lang="en-AU"/>
           </a:p>
@@ -879,7 +885,7 @@
           <a:p>
             <a:fld id="{B163C8C7-CBCA-4667-931A-6DAEBDCEF4E5}" type="datetimeFigureOut">
               <a:rPr lang="en-AU" smtClean="0"/>
-              <a:t>28/09/2026</a:t>
+              <a:t>12/10/2026</a:t>
             </a:fld>
             <a:endParaRPr lang="en-AU"/>
           </a:p>
@@ -1155,7 +1161,7 @@
           <a:p>
             <a:fld id="{B163C8C7-CBCA-4667-931A-6DAEBDCEF4E5}" type="datetimeFigureOut">
               <a:rPr lang="en-AU" smtClean="0"/>
-              <a:t>28/09/2026</a:t>
+              <a:t>12/10/2026</a:t>
             </a:fld>
             <a:endParaRPr lang="en-AU"/>
           </a:p>
@@ -1423,7 +1429,7 @@
           <a:p>
             <a:fld id="{B163C8C7-CBCA-4667-931A-6DAEBDCEF4E5}" type="datetimeFigureOut">
               <a:rPr lang="en-AU" smtClean="0"/>
-              <a:t>28/09/2026</a:t>
+              <a:t>12/10/2026</a:t>
             </a:fld>
             <a:endParaRPr lang="en-AU"/>
           </a:p>
@@ -1838,7 +1844,7 @@
           <a:p>
             <a:fld id="{B163C8C7-CBCA-4667-931A-6DAEBDCEF4E5}" type="datetimeFigureOut">
               <a:rPr lang="en-AU" smtClean="0"/>
-              <a:t>28/09/2026</a:t>
+              <a:t>12/10/2026</a:t>
             </a:fld>
             <a:endParaRPr lang="en-AU"/>
           </a:p>
@@ -1980,7 +1986,7 @@
           <a:p>
             <a:fld id="{B163C8C7-CBCA-4667-931A-6DAEBDCEF4E5}" type="datetimeFigureOut">
               <a:rPr lang="en-AU" smtClean="0"/>
-              <a:t>28/09/2026</a:t>
+              <a:t>12/10/2026</a:t>
             </a:fld>
             <a:endParaRPr lang="en-AU"/>
           </a:p>
@@ -2093,7 +2099,7 @@
           <a:p>
             <a:fld id="{B163C8C7-CBCA-4667-931A-6DAEBDCEF4E5}" type="datetimeFigureOut">
               <a:rPr lang="en-AU" smtClean="0"/>
-              <a:t>28/09/2026</a:t>
+              <a:t>12/10/2026</a:t>
             </a:fld>
             <a:endParaRPr lang="en-AU"/>
           </a:p>
@@ -2406,7 +2412,7 @@
           <a:p>
             <a:fld id="{B163C8C7-CBCA-4667-931A-6DAEBDCEF4E5}" type="datetimeFigureOut">
               <a:rPr lang="en-AU" smtClean="0"/>
-              <a:t>28/09/2026</a:t>
+              <a:t>12/10/2026</a:t>
             </a:fld>
             <a:endParaRPr lang="en-AU"/>
           </a:p>
@@ -2695,7 +2701,7 @@
           <a:p>
             <a:fld id="{B163C8C7-CBCA-4667-931A-6DAEBDCEF4E5}" type="datetimeFigureOut">
               <a:rPr lang="en-AU" smtClean="0"/>
-              <a:t>28/09/2026</a:t>
+              <a:t>12/10/2026</a:t>
             </a:fld>
             <a:endParaRPr lang="en-AU"/>
           </a:p>
@@ -2938,7 +2944,7 @@
           <a:p>
             <a:fld id="{B163C8C7-CBCA-4667-931A-6DAEBDCEF4E5}" type="datetimeFigureOut">
               <a:rPr lang="en-AU" smtClean="0"/>
-              <a:t>28/09/2026</a:t>
+              <a:t>12/10/2026</a:t>
             </a:fld>
             <a:endParaRPr lang="en-AU"/>
           </a:p>
@@ -3360,7 +3366,7 @@
           <p:cNvPr id="2" name="Title 1">
             <a:extLst>
               <a:ext uri="{FF2B5EF4-FFF2-40B4-BE49-F238E27FC236}">
-                <a16:creationId xmlns:a16="http://schemas.microsoft.com/office/drawing/2014/main" id="{103C1C32-D0C4-6B78-4C26-309946A12340}"/>
+                <a16:creationId xmlns:a16="http://schemas.microsoft.com/office/drawing/2014/main" id="{C3AF55AE-6017-F3D3-9ED4-74B6648B472E}"/>
               </a:ext>
             </a:extLst>
           </p:cNvPr>
@@ -3377,97 +3383,76 @@
           <a:lstStyle/>
           <a:p>
             <a:r>
-              <a:rPr lang="en-US" dirty="0">
-                <a:solidFill>
-                  <a:srgbClr val="FF0000"/>
-                </a:solidFill>
-              </a:rPr>
-              <a:t>CD8 Tet+</a:t>
-            </a:r>
-            <a:endParaRPr lang="en-AU" dirty="0">
-              <a:solidFill>
-                <a:srgbClr val="FF0000"/>
-              </a:solidFill>
-            </a:endParaRPr>
-          </a:p>
-        </p:txBody>
-      </p:sp>
-      <p:pic>
-        <p:nvPicPr>
-          <p:cNvPr id="13" name="Picture 12">
-            <a:extLst>
-              <a:ext uri="{FF2B5EF4-FFF2-40B4-BE49-F238E27FC236}">
-                <a16:creationId xmlns:a16="http://schemas.microsoft.com/office/drawing/2014/main" id="{7B8EC501-B394-923C-6041-5EA80470DAC0}"/>
-              </a:ext>
-            </a:extLst>
-          </p:cNvPr>
-          <p:cNvPicPr>
-            <a:picLocks noChangeAspect="1"/>
-          </p:cNvPicPr>
-          <p:nvPr/>
-        </p:nvPicPr>
-        <p:blipFill>
-          <a:blip r:embed="rId2">
-            <a:extLst>
-              <a:ext uri="{28A0092B-C50C-407E-A947-70E740481C1C}">
-                <a14:useLocalDpi xmlns:a14="http://schemas.microsoft.com/office/drawing/2010/main" val="0"/>
-              </a:ext>
-            </a:extLst>
-          </a:blip>
-          <a:stretch>
-            <a:fillRect/>
-          </a:stretch>
-        </p:blipFill>
-        <p:spPr>
-          <a:xfrm>
-            <a:off x="0" y="1784060"/>
-            <a:ext cx="6400813" cy="3840488"/>
-          </a:xfrm>
-          <a:prstGeom prst="rect">
-            <a:avLst/>
-          </a:prstGeom>
-        </p:spPr>
-      </p:pic>
-      <p:pic>
-        <p:nvPicPr>
-          <p:cNvPr id="15" name="Picture 14">
-            <a:extLst>
-              <a:ext uri="{FF2B5EF4-FFF2-40B4-BE49-F238E27FC236}">
-                <a16:creationId xmlns:a16="http://schemas.microsoft.com/office/drawing/2014/main" id="{CC6812FA-66E8-9787-45FA-795B96F6AA78}"/>
-              </a:ext>
-            </a:extLst>
-          </p:cNvPr>
-          <p:cNvPicPr>
-            <a:picLocks noChangeAspect="1"/>
-          </p:cNvPicPr>
-          <p:nvPr/>
-        </p:nvPicPr>
-        <p:blipFill>
-          <a:blip r:embed="rId3">
-            <a:extLst>
-              <a:ext uri="{28A0092B-C50C-407E-A947-70E740481C1C}">
-                <a14:useLocalDpi xmlns:a14="http://schemas.microsoft.com/office/drawing/2010/main" val="0"/>
-              </a:ext>
-            </a:extLst>
-          </a:blip>
-          <a:stretch>
-            <a:fillRect/>
-          </a:stretch>
-        </p:blipFill>
-        <p:spPr>
-          <a:xfrm>
-            <a:off x="6705589" y="2378911"/>
-            <a:ext cx="5486411" cy="2926086"/>
-          </a:xfrm>
-          <a:prstGeom prst="rect">
-            <a:avLst/>
-          </a:prstGeom>
-        </p:spPr>
-      </p:pic>
+              <a:rPr lang="en-AU" dirty="0"/>
+              <a:t>Decay the first 2 and the last 2 timepoints</a:t>
+            </a:r>
+          </a:p>
+        </p:txBody>
+      </p:sp>
+      <p:sp>
+        <p:nvSpPr>
+          <p:cNvPr id="3" name="Content Placeholder 2">
+            <a:extLst>
+              <a:ext uri="{FF2B5EF4-FFF2-40B4-BE49-F238E27FC236}">
+                <a16:creationId xmlns:a16="http://schemas.microsoft.com/office/drawing/2014/main" id="{8026A5BF-AF9B-B527-BF7C-75E28FD5EFA8}"/>
+              </a:ext>
+            </a:extLst>
+          </p:cNvPr>
+          <p:cNvSpPr>
+            <a:spLocks noGrp="1"/>
+          </p:cNvSpPr>
+          <p:nvPr>
+            <p:ph idx="1"/>
+          </p:nvPr>
+        </p:nvSpPr>
+        <p:spPr/>
+        <p:txBody>
+          <a:bodyPr/>
+          <a:lstStyle/>
+          <a:p>
+            <a:r>
+              <a:rPr lang="en-AU" dirty="0"/>
+              <a:t>Compare the decay rate with </a:t>
+            </a:r>
+            <a:r>
+              <a:rPr lang="en-AU" i="1" dirty="0" err="1"/>
+              <a:t>emmeans</a:t>
+            </a:r>
+            <a:r>
+              <a:rPr lang="en-AU" dirty="0"/>
+              <a:t> to get the adjusted pairwise p-value comparison </a:t>
+            </a:r>
+          </a:p>
+          <a:p>
+            <a:r>
+              <a:rPr lang="en-AU" i="1" dirty="0" err="1"/>
+              <a:t>Emmeans</a:t>
+            </a:r>
+            <a:r>
+              <a:rPr lang="en-AU" dirty="0"/>
+              <a:t> is like Anova with multiple comparison </a:t>
+            </a:r>
+          </a:p>
+          <a:p>
+            <a:r>
+              <a:rPr lang="en-AU" dirty="0"/>
+              <a:t>If CI (</a:t>
+            </a:r>
+            <a:r>
+              <a:rPr lang="en-AU"/>
+              <a:t>of half-life) </a:t>
+            </a:r>
+            <a:r>
+              <a:rPr lang="en-AU" dirty="0"/>
+              <a:t>is unbounded, just show the point estimate</a:t>
+            </a:r>
+          </a:p>
+        </p:txBody>
+      </p:sp>
     </p:spTree>
     <p:extLst>
       <p:ext uri="{BB962C8B-B14F-4D97-AF65-F5344CB8AC3E}">
-        <p14:creationId xmlns:p14="http://schemas.microsoft.com/office/powerpoint/2010/main" val="1685131050"/>
+        <p14:creationId xmlns:p14="http://schemas.microsoft.com/office/powerpoint/2010/main" val="542140797"/>
       </p:ext>
     </p:extLst>
   </p:cSld>
@@ -3478,6 +3463,175 @@
 </file>
 
 <file path=ppt/slides/slide10.xml><?xml version="1.0" encoding="utf-8"?>
+<p:sld xmlns:a="http://schemas.openxmlformats.org/drawingml/2006/main" xmlns:r="http://schemas.openxmlformats.org/officeDocument/2006/relationships" xmlns:p="http://schemas.openxmlformats.org/presentationml/2006/main">
+  <p:cSld>
+    <p:spTree>
+      <p:nvGrpSpPr>
+        <p:cNvPr id="1" name="">
+          <a:extLst>
+            <a:ext uri="{FF2B5EF4-FFF2-40B4-BE49-F238E27FC236}">
+              <a16:creationId xmlns:a16="http://schemas.microsoft.com/office/drawing/2014/main" id="{6F944B98-8647-75C5-E2BF-60C0F4C685F9}"/>
+            </a:ext>
+          </a:extLst>
+        </p:cNvPr>
+        <p:cNvGrpSpPr/>
+        <p:nvPr/>
+      </p:nvGrpSpPr>
+      <p:grpSpPr>
+        <a:xfrm>
+          <a:off x="0" y="0"/>
+          <a:ext cx="0" cy="0"/>
+          <a:chOff x="0" y="0"/>
+          <a:chExt cx="0" cy="0"/>
+        </a:xfrm>
+      </p:grpSpPr>
+      <p:sp>
+        <p:nvSpPr>
+          <p:cNvPr id="2" name="Title 1">
+            <a:extLst>
+              <a:ext uri="{FF2B5EF4-FFF2-40B4-BE49-F238E27FC236}">
+                <a16:creationId xmlns:a16="http://schemas.microsoft.com/office/drawing/2014/main" id="{662F47B6-03EA-D3B8-D16C-2F821E1A357B}"/>
+              </a:ext>
+            </a:extLst>
+          </p:cNvPr>
+          <p:cNvSpPr>
+            <a:spLocks noGrp="1"/>
+          </p:cNvSpPr>
+          <p:nvPr>
+            <p:ph type="title"/>
+          </p:nvPr>
+        </p:nvSpPr>
+        <p:spPr/>
+        <p:txBody>
+          <a:bodyPr/>
+          <a:lstStyle/>
+          <a:p>
+            <a:r>
+              <a:rPr lang="en-AU" dirty="0">
+                <a:solidFill>
+                  <a:srgbClr val="00B050"/>
+                </a:solidFill>
+              </a:rPr>
+              <a:t>CD4 </a:t>
+            </a:r>
+            <a:r>
+              <a:rPr lang="en-AU" dirty="0" err="1">
+                <a:solidFill>
+                  <a:srgbClr val="00B050"/>
+                </a:solidFill>
+              </a:rPr>
+              <a:t>tet</a:t>
+            </a:r>
+            <a:r>
+              <a:rPr lang="en-AU" dirty="0">
+                <a:solidFill>
+                  <a:srgbClr val="00B050"/>
+                </a:solidFill>
+              </a:rPr>
+              <a:t>+ Ly6C FOXP3 </a:t>
+            </a:r>
+            <a:r>
+              <a:rPr lang="en-AU" dirty="0" err="1">
+                <a:solidFill>
+                  <a:srgbClr val="00B050"/>
+                </a:solidFill>
+              </a:rPr>
+              <a:t>Teff_cells</a:t>
+            </a:r>
+            <a:endParaRPr lang="en-AU" dirty="0">
+              <a:solidFill>
+                <a:srgbClr val="00B050"/>
+              </a:solidFill>
+            </a:endParaRPr>
+          </a:p>
+        </p:txBody>
+      </p:sp>
+      <p:pic>
+        <p:nvPicPr>
+          <p:cNvPr id="16" name="Picture 15">
+            <a:extLst>
+              <a:ext uri="{FF2B5EF4-FFF2-40B4-BE49-F238E27FC236}">
+                <a16:creationId xmlns:a16="http://schemas.microsoft.com/office/drawing/2014/main" id="{F319E17D-BA0F-135A-0CAB-745F695BC067}"/>
+              </a:ext>
+            </a:extLst>
+          </p:cNvPr>
+          <p:cNvPicPr>
+            <a:picLocks noChangeAspect="1"/>
+          </p:cNvPicPr>
+          <p:nvPr/>
+        </p:nvPicPr>
+        <p:blipFill>
+          <a:blip r:embed="rId2">
+            <a:extLst>
+              <a:ext uri="{28A0092B-C50C-407E-A947-70E740481C1C}">
+                <a14:useLocalDpi xmlns:a14="http://schemas.microsoft.com/office/drawing/2010/main" val="0"/>
+              </a:ext>
+            </a:extLst>
+          </a:blip>
+          <a:stretch>
+            <a:fillRect/>
+          </a:stretch>
+        </p:blipFill>
+        <p:spPr>
+          <a:xfrm>
+            <a:off x="6585091" y="2603911"/>
+            <a:ext cx="5486411" cy="2926086"/>
+          </a:xfrm>
+          <a:prstGeom prst="rect">
+            <a:avLst/>
+          </a:prstGeom>
+        </p:spPr>
+      </p:pic>
+      <p:pic>
+        <p:nvPicPr>
+          <p:cNvPr id="4" name="Picture 3">
+            <a:extLst>
+              <a:ext uri="{FF2B5EF4-FFF2-40B4-BE49-F238E27FC236}">
+                <a16:creationId xmlns:a16="http://schemas.microsoft.com/office/drawing/2014/main" id="{D6D00EAF-CEC5-12BA-D873-9CF9AB01C6B2}"/>
+              </a:ext>
+            </a:extLst>
+          </p:cNvPr>
+          <p:cNvPicPr>
+            <a:picLocks noChangeAspect="1"/>
+          </p:cNvPicPr>
+          <p:nvPr/>
+        </p:nvPicPr>
+        <p:blipFill>
+          <a:blip r:embed="rId3">
+            <a:extLst>
+              <a:ext uri="{28A0092B-C50C-407E-A947-70E740481C1C}">
+                <a14:useLocalDpi xmlns:a14="http://schemas.microsoft.com/office/drawing/2010/main" val="0"/>
+              </a:ext>
+            </a:extLst>
+          </a:blip>
+          <a:stretch>
+            <a:fillRect/>
+          </a:stretch>
+        </p:blipFill>
+        <p:spPr>
+          <a:xfrm>
+            <a:off x="0" y="2008486"/>
+            <a:ext cx="6400813" cy="3840488"/>
+          </a:xfrm>
+          <a:prstGeom prst="rect">
+            <a:avLst/>
+          </a:prstGeom>
+        </p:spPr>
+      </p:pic>
+    </p:spTree>
+    <p:extLst>
+      <p:ext uri="{BB962C8B-B14F-4D97-AF65-F5344CB8AC3E}">
+        <p14:creationId xmlns:p14="http://schemas.microsoft.com/office/powerpoint/2010/main" val="1450115306"/>
+      </p:ext>
+    </p:extLst>
+  </p:cSld>
+  <p:clrMapOvr>
+    <a:masterClrMapping/>
+  </p:clrMapOvr>
+</p:sld>
+</file>
+
+<file path=ppt/slides/slide11.xml><?xml version="1.0" encoding="utf-8"?>
 <p:sld xmlns:a="http://schemas.openxmlformats.org/drawingml/2006/main" xmlns:r="http://schemas.openxmlformats.org/officeDocument/2006/relationships" xmlns:p="http://schemas.openxmlformats.org/presentationml/2006/main">
   <p:cSld>
     <p:spTree>
@@ -3563,10 +3717,10 @@
       </p:sp>
       <p:pic>
         <p:nvPicPr>
-          <p:cNvPr id="4" name="Picture 3">
-            <a:extLst>
-              <a:ext uri="{FF2B5EF4-FFF2-40B4-BE49-F238E27FC236}">
-                <a16:creationId xmlns:a16="http://schemas.microsoft.com/office/drawing/2014/main" id="{4E68B48D-429D-C6E8-E160-12B25F18C1E3}"/>
+          <p:cNvPr id="6" name="Picture 5">
+            <a:extLst>
+              <a:ext uri="{FF2B5EF4-FFF2-40B4-BE49-F238E27FC236}">
+                <a16:creationId xmlns:a16="http://schemas.microsoft.com/office/drawing/2014/main" id="{2311B885-193C-0F32-F310-CBADBFB34709}"/>
               </a:ext>
             </a:extLst>
           </p:cNvPr>
@@ -3577,42 +3731,6 @@
         </p:nvPicPr>
         <p:blipFill>
           <a:blip r:embed="rId2">
-            <a:extLst>
-              <a:ext uri="{28A0092B-C50C-407E-A947-70E740481C1C}">
-                <a14:useLocalDpi xmlns:a14="http://schemas.microsoft.com/office/drawing/2010/main" val="0"/>
-              </a:ext>
-            </a:extLst>
-          </a:blip>
-          <a:stretch>
-            <a:fillRect/>
-          </a:stretch>
-        </p:blipFill>
-        <p:spPr>
-          <a:xfrm>
-            <a:off x="0" y="2199873"/>
-            <a:ext cx="6400813" cy="3840488"/>
-          </a:xfrm>
-          <a:prstGeom prst="rect">
-            <a:avLst/>
-          </a:prstGeom>
-        </p:spPr>
-      </p:pic>
-      <p:pic>
-        <p:nvPicPr>
-          <p:cNvPr id="6" name="Picture 5">
-            <a:extLst>
-              <a:ext uri="{FF2B5EF4-FFF2-40B4-BE49-F238E27FC236}">
-                <a16:creationId xmlns:a16="http://schemas.microsoft.com/office/drawing/2014/main" id="{2311B885-193C-0F32-F310-CBADBFB34709}"/>
-              </a:ext>
-            </a:extLst>
-          </p:cNvPr>
-          <p:cNvPicPr>
-            <a:picLocks noChangeAspect="1"/>
-          </p:cNvPicPr>
-          <p:nvPr/>
-        </p:nvPicPr>
-        <p:blipFill>
-          <a:blip r:embed="rId3">
             <a:extLst>
               <a:ext uri="{28A0092B-C50C-407E-A947-70E740481C1C}">
                 <a14:useLocalDpi xmlns:a14="http://schemas.microsoft.com/office/drawing/2010/main" val="0"/>
@@ -3627,6 +3745,42 @@
           <a:xfrm>
             <a:off x="6705589" y="2805929"/>
             <a:ext cx="5486411" cy="2926086"/>
+          </a:xfrm>
+          <a:prstGeom prst="rect">
+            <a:avLst/>
+          </a:prstGeom>
+        </p:spPr>
+      </p:pic>
+      <p:pic>
+        <p:nvPicPr>
+          <p:cNvPr id="5" name="Picture 4">
+            <a:extLst>
+              <a:ext uri="{FF2B5EF4-FFF2-40B4-BE49-F238E27FC236}">
+                <a16:creationId xmlns:a16="http://schemas.microsoft.com/office/drawing/2014/main" id="{6DF6E8ED-B1BE-BF3B-9481-74BC1FB7A093}"/>
+              </a:ext>
+            </a:extLst>
+          </p:cNvPr>
+          <p:cNvPicPr>
+            <a:picLocks noChangeAspect="1"/>
+          </p:cNvPicPr>
+          <p:nvPr/>
+        </p:nvPicPr>
+        <p:blipFill>
+          <a:blip r:embed="rId3">
+            <a:extLst>
+              <a:ext uri="{28A0092B-C50C-407E-A947-70E740481C1C}">
+                <a14:useLocalDpi xmlns:a14="http://schemas.microsoft.com/office/drawing/2010/main" val="0"/>
+              </a:ext>
+            </a:extLst>
+          </a:blip>
+          <a:stretch>
+            <a:fillRect/>
+          </a:stretch>
+        </p:blipFill>
+        <p:spPr>
+          <a:xfrm>
+            <a:off x="0" y="2136077"/>
+            <a:ext cx="6400813" cy="3840488"/>
           </a:xfrm>
           <a:prstGeom prst="rect">
             <a:avLst/>
@@ -3646,7 +3800,7 @@
 </p:sld>
 </file>
 
-<file path=ppt/slides/slide11.xml><?xml version="1.0" encoding="utf-8"?>
+<file path=ppt/slides/slide12.xml><?xml version="1.0" encoding="utf-8"?>
 <p:sld xmlns:a="http://schemas.openxmlformats.org/drawingml/2006/main" xmlns:r="http://schemas.openxmlformats.org/officeDocument/2006/relationships" xmlns:p="http://schemas.openxmlformats.org/presentationml/2006/main">
   <p:cSld>
     <p:spTree>
@@ -3732,10 +3886,10 @@
       </p:sp>
       <p:pic>
         <p:nvPicPr>
-          <p:cNvPr id="5" name="Picture 4">
-            <a:extLst>
-              <a:ext uri="{FF2B5EF4-FFF2-40B4-BE49-F238E27FC236}">
-                <a16:creationId xmlns:a16="http://schemas.microsoft.com/office/drawing/2014/main" id="{DC764DA7-84D8-2307-3350-8E4999D2223A}"/>
+          <p:cNvPr id="8" name="Picture 7">
+            <a:extLst>
+              <a:ext uri="{FF2B5EF4-FFF2-40B4-BE49-F238E27FC236}">
+                <a16:creationId xmlns:a16="http://schemas.microsoft.com/office/drawing/2014/main" id="{3A39D8B8-7C68-221E-CBE9-76878B205894}"/>
               </a:ext>
             </a:extLst>
           </p:cNvPr>
@@ -3746,42 +3900,6 @@
         </p:nvPicPr>
         <p:blipFill>
           <a:blip r:embed="rId2">
-            <a:extLst>
-              <a:ext uri="{28A0092B-C50C-407E-A947-70E740481C1C}">
-                <a14:useLocalDpi xmlns:a14="http://schemas.microsoft.com/office/drawing/2010/main" val="0"/>
-              </a:ext>
-            </a:extLst>
-          </a:blip>
-          <a:stretch>
-            <a:fillRect/>
-          </a:stretch>
-        </p:blipFill>
-        <p:spPr>
-          <a:xfrm>
-            <a:off x="0" y="2088859"/>
-            <a:ext cx="6400813" cy="3840488"/>
-          </a:xfrm>
-          <a:prstGeom prst="rect">
-            <a:avLst/>
-          </a:prstGeom>
-        </p:spPr>
-      </p:pic>
-      <p:pic>
-        <p:nvPicPr>
-          <p:cNvPr id="8" name="Picture 7">
-            <a:extLst>
-              <a:ext uri="{FF2B5EF4-FFF2-40B4-BE49-F238E27FC236}">
-                <a16:creationId xmlns:a16="http://schemas.microsoft.com/office/drawing/2014/main" id="{3A39D8B8-7C68-221E-CBE9-76878B205894}"/>
-              </a:ext>
-            </a:extLst>
-          </p:cNvPr>
-          <p:cNvPicPr>
-            <a:picLocks noChangeAspect="1"/>
-          </p:cNvPicPr>
-          <p:nvPr/>
-        </p:nvPicPr>
-        <p:blipFill>
-          <a:blip r:embed="rId3">
             <a:extLst>
               <a:ext uri="{28A0092B-C50C-407E-A947-70E740481C1C}">
                 <a14:useLocalDpi xmlns:a14="http://schemas.microsoft.com/office/drawing/2010/main" val="0"/>
@@ -3796,6 +3914,42 @@
           <a:xfrm>
             <a:off x="6626936" y="2752538"/>
             <a:ext cx="5486411" cy="2926086"/>
+          </a:xfrm>
+          <a:prstGeom prst="rect">
+            <a:avLst/>
+          </a:prstGeom>
+        </p:spPr>
+      </p:pic>
+      <p:pic>
+        <p:nvPicPr>
+          <p:cNvPr id="4" name="Picture 3">
+            <a:extLst>
+              <a:ext uri="{FF2B5EF4-FFF2-40B4-BE49-F238E27FC236}">
+                <a16:creationId xmlns:a16="http://schemas.microsoft.com/office/drawing/2014/main" id="{CA196EA2-57AC-4069-EC88-E87F0381D1EC}"/>
+              </a:ext>
+            </a:extLst>
+          </p:cNvPr>
+          <p:cNvPicPr>
+            <a:picLocks noChangeAspect="1"/>
+          </p:cNvPicPr>
+          <p:nvPr/>
+        </p:nvPicPr>
+        <p:blipFill>
+          <a:blip r:embed="rId3">
+            <a:extLst>
+              <a:ext uri="{28A0092B-C50C-407E-A947-70E740481C1C}">
+                <a14:useLocalDpi xmlns:a14="http://schemas.microsoft.com/office/drawing/2010/main" val="0"/>
+              </a:ext>
+            </a:extLst>
+          </a:blip>
+          <a:stretch>
+            <a:fillRect/>
+          </a:stretch>
+        </p:blipFill>
+        <p:spPr>
+          <a:xfrm>
+            <a:off x="0" y="2210505"/>
+            <a:ext cx="6400813" cy="3840488"/>
           </a:xfrm>
           <a:prstGeom prst="rect">
             <a:avLst/>
@@ -3815,7 +3969,7 @@
 </p:sld>
 </file>
 
-<file path=ppt/slides/slide12.xml><?xml version="1.0" encoding="utf-8"?>
+<file path=ppt/slides/slide13.xml><?xml version="1.0" encoding="utf-8"?>
 <p:sld xmlns:a="http://schemas.openxmlformats.org/drawingml/2006/main" xmlns:r="http://schemas.openxmlformats.org/officeDocument/2006/relationships" xmlns:p="http://schemas.openxmlformats.org/presentationml/2006/main">
   <p:cSld>
     <p:spTree>
@@ -3901,10 +4055,10 @@
       </p:sp>
       <p:pic>
         <p:nvPicPr>
-          <p:cNvPr id="4" name="Picture 3">
-            <a:extLst>
-              <a:ext uri="{FF2B5EF4-FFF2-40B4-BE49-F238E27FC236}">
-                <a16:creationId xmlns:a16="http://schemas.microsoft.com/office/drawing/2014/main" id="{F19B2F8F-8018-F055-5C76-58E2FBBD7BB8}"/>
+          <p:cNvPr id="7" name="Picture 6">
+            <a:extLst>
+              <a:ext uri="{FF2B5EF4-FFF2-40B4-BE49-F238E27FC236}">
+                <a16:creationId xmlns:a16="http://schemas.microsoft.com/office/drawing/2014/main" id="{A4611268-D04D-6227-F279-D087A2B0C1AA}"/>
               </a:ext>
             </a:extLst>
           </p:cNvPr>
@@ -3915,42 +4069,6 @@
         </p:nvPicPr>
         <p:blipFill>
           <a:blip r:embed="rId2">
-            <a:extLst>
-              <a:ext uri="{28A0092B-C50C-407E-A947-70E740481C1C}">
-                <a14:useLocalDpi xmlns:a14="http://schemas.microsoft.com/office/drawing/2010/main" val="0"/>
-              </a:ext>
-            </a:extLst>
-          </a:blip>
-          <a:stretch>
-            <a:fillRect/>
-          </a:stretch>
-        </p:blipFill>
-        <p:spPr>
-          <a:xfrm>
-            <a:off x="0" y="2138021"/>
-            <a:ext cx="6400813" cy="3840488"/>
-          </a:xfrm>
-          <a:prstGeom prst="rect">
-            <a:avLst/>
-          </a:prstGeom>
-        </p:spPr>
-      </p:pic>
-      <p:pic>
-        <p:nvPicPr>
-          <p:cNvPr id="7" name="Picture 6">
-            <a:extLst>
-              <a:ext uri="{FF2B5EF4-FFF2-40B4-BE49-F238E27FC236}">
-                <a16:creationId xmlns:a16="http://schemas.microsoft.com/office/drawing/2014/main" id="{A4611268-D04D-6227-F279-D087A2B0C1AA}"/>
-              </a:ext>
-            </a:extLst>
-          </p:cNvPr>
-          <p:cNvPicPr>
-            <a:picLocks noChangeAspect="1"/>
-          </p:cNvPicPr>
-          <p:nvPr/>
-        </p:nvPicPr>
-        <p:blipFill>
-          <a:blip r:embed="rId3">
             <a:extLst>
               <a:ext uri="{28A0092B-C50C-407E-A947-70E740481C1C}">
                 <a14:useLocalDpi xmlns:a14="http://schemas.microsoft.com/office/drawing/2010/main" val="0"/>
@@ -3965,6 +4083,42 @@
           <a:xfrm>
             <a:off x="6705589" y="2693544"/>
             <a:ext cx="5486411" cy="2926086"/>
+          </a:xfrm>
+          <a:prstGeom prst="rect">
+            <a:avLst/>
+          </a:prstGeom>
+        </p:spPr>
+      </p:pic>
+      <p:pic>
+        <p:nvPicPr>
+          <p:cNvPr id="5" name="Picture 4">
+            <a:extLst>
+              <a:ext uri="{FF2B5EF4-FFF2-40B4-BE49-F238E27FC236}">
+                <a16:creationId xmlns:a16="http://schemas.microsoft.com/office/drawing/2014/main" id="{F145E942-59BE-6D8B-3F82-29BB3FC8EEBD}"/>
+              </a:ext>
+            </a:extLst>
+          </p:cNvPr>
+          <p:cNvPicPr>
+            <a:picLocks noChangeAspect="1"/>
+          </p:cNvPicPr>
+          <p:nvPr/>
+        </p:nvPicPr>
+        <p:blipFill>
+          <a:blip r:embed="rId3">
+            <a:extLst>
+              <a:ext uri="{28A0092B-C50C-407E-A947-70E740481C1C}">
+                <a14:useLocalDpi xmlns:a14="http://schemas.microsoft.com/office/drawing/2010/main" val="0"/>
+              </a:ext>
+            </a:extLst>
+          </a:blip>
+          <a:stretch>
+            <a:fillRect/>
+          </a:stretch>
+        </p:blipFill>
+        <p:spPr>
+          <a:xfrm>
+            <a:off x="0" y="2236343"/>
+            <a:ext cx="6400813" cy="3840488"/>
           </a:xfrm>
           <a:prstGeom prst="rect">
             <a:avLst/>
@@ -3984,7 +4138,7 @@
 </p:sld>
 </file>
 
-<file path=ppt/slides/slide13.xml><?xml version="1.0" encoding="utf-8"?>
+<file path=ppt/slides/slide14.xml><?xml version="1.0" encoding="utf-8"?>
 <p:sld xmlns:a="http://schemas.openxmlformats.org/drawingml/2006/main" xmlns:r="http://schemas.openxmlformats.org/officeDocument/2006/relationships" xmlns:p="http://schemas.openxmlformats.org/presentationml/2006/main">
   <p:cSld>
     <p:spTree>
@@ -4057,10 +4211,10 @@
       </p:sp>
       <p:pic>
         <p:nvPicPr>
-          <p:cNvPr id="4" name="Picture 3">
-            <a:extLst>
-              <a:ext uri="{FF2B5EF4-FFF2-40B4-BE49-F238E27FC236}">
-                <a16:creationId xmlns:a16="http://schemas.microsoft.com/office/drawing/2014/main" id="{EA11F807-1899-9C8F-4AAD-C68A591D4173}"/>
+          <p:cNvPr id="7" name="Picture 6">
+            <a:extLst>
+              <a:ext uri="{FF2B5EF4-FFF2-40B4-BE49-F238E27FC236}">
+                <a16:creationId xmlns:a16="http://schemas.microsoft.com/office/drawing/2014/main" id="{A0518BEA-C7E3-90B6-88E4-62924B666277}"/>
               </a:ext>
             </a:extLst>
           </p:cNvPr>
@@ -4071,42 +4225,6 @@
         </p:nvPicPr>
         <p:blipFill>
           <a:blip r:embed="rId2">
-            <a:extLst>
-              <a:ext uri="{28A0092B-C50C-407E-A947-70E740481C1C}">
-                <a14:useLocalDpi xmlns:a14="http://schemas.microsoft.com/office/drawing/2010/main" val="0"/>
-              </a:ext>
-            </a:extLst>
-          </a:blip>
-          <a:stretch>
-            <a:fillRect/>
-          </a:stretch>
-        </p:blipFill>
-        <p:spPr>
-          <a:xfrm>
-            <a:off x="0" y="2059363"/>
-            <a:ext cx="6400813" cy="3840488"/>
-          </a:xfrm>
-          <a:prstGeom prst="rect">
-            <a:avLst/>
-          </a:prstGeom>
-        </p:spPr>
-      </p:pic>
-      <p:pic>
-        <p:nvPicPr>
-          <p:cNvPr id="7" name="Picture 6">
-            <a:extLst>
-              <a:ext uri="{FF2B5EF4-FFF2-40B4-BE49-F238E27FC236}">
-                <a16:creationId xmlns:a16="http://schemas.microsoft.com/office/drawing/2014/main" id="{A0518BEA-C7E3-90B6-88E4-62924B666277}"/>
-              </a:ext>
-            </a:extLst>
-          </p:cNvPr>
-          <p:cNvPicPr>
-            <a:picLocks noChangeAspect="1"/>
-          </p:cNvPicPr>
-          <p:nvPr/>
-        </p:nvPicPr>
-        <p:blipFill>
-          <a:blip r:embed="rId3">
             <a:extLst>
               <a:ext uri="{28A0092B-C50C-407E-A947-70E740481C1C}">
                 <a14:useLocalDpi xmlns:a14="http://schemas.microsoft.com/office/drawing/2010/main" val="0"/>
@@ -4121,6 +4239,42 @@
           <a:xfrm>
             <a:off x="6607272" y="2732873"/>
             <a:ext cx="5486411" cy="2926086"/>
+          </a:xfrm>
+          <a:prstGeom prst="rect">
+            <a:avLst/>
+          </a:prstGeom>
+        </p:spPr>
+      </p:pic>
+      <p:pic>
+        <p:nvPicPr>
+          <p:cNvPr id="5" name="Picture 4">
+            <a:extLst>
+              <a:ext uri="{FF2B5EF4-FFF2-40B4-BE49-F238E27FC236}">
+                <a16:creationId xmlns:a16="http://schemas.microsoft.com/office/drawing/2014/main" id="{999664D8-3F1E-A59F-2A10-F521C1ACADF7}"/>
+              </a:ext>
+            </a:extLst>
+          </p:cNvPr>
+          <p:cNvPicPr>
+            <a:picLocks noChangeAspect="1"/>
+          </p:cNvPicPr>
+          <p:nvPr/>
+        </p:nvPicPr>
+        <p:blipFill>
+          <a:blip r:embed="rId3">
+            <a:extLst>
+              <a:ext uri="{28A0092B-C50C-407E-A947-70E740481C1C}">
+                <a14:useLocalDpi xmlns:a14="http://schemas.microsoft.com/office/drawing/2010/main" val="0"/>
+              </a:ext>
+            </a:extLst>
+          </a:blip>
+          <a:stretch>
+            <a:fillRect/>
+          </a:stretch>
+        </p:blipFill>
+        <p:spPr>
+          <a:xfrm>
+            <a:off x="0" y="2104179"/>
+            <a:ext cx="6400813" cy="3840488"/>
           </a:xfrm>
           <a:prstGeom prst="rect">
             <a:avLst/>
@@ -4140,7 +4294,7 @@
 </p:sld>
 </file>
 
-<file path=ppt/slides/slide14.xml><?xml version="1.0" encoding="utf-8"?>
+<file path=ppt/slides/slide15.xml><?xml version="1.0" encoding="utf-8"?>
 <p:sld xmlns:a="http://schemas.openxmlformats.org/drawingml/2006/main" xmlns:r="http://schemas.openxmlformats.org/officeDocument/2006/relationships" xmlns:p="http://schemas.openxmlformats.org/presentationml/2006/main">
   <p:cSld>
     <p:spTree>
@@ -4213,10 +4367,10 @@
       </p:sp>
       <p:pic>
         <p:nvPicPr>
-          <p:cNvPr id="5" name="Picture 4">
-            <a:extLst>
-              <a:ext uri="{FF2B5EF4-FFF2-40B4-BE49-F238E27FC236}">
-                <a16:creationId xmlns:a16="http://schemas.microsoft.com/office/drawing/2014/main" id="{6DC7D4F9-4344-A570-00B4-1E1D003AA703}"/>
+          <p:cNvPr id="8" name="Picture 7">
+            <a:extLst>
+              <a:ext uri="{FF2B5EF4-FFF2-40B4-BE49-F238E27FC236}">
+                <a16:creationId xmlns:a16="http://schemas.microsoft.com/office/drawing/2014/main" id="{5A3F2B5B-248E-E063-7A52-A79905C346B8}"/>
               </a:ext>
             </a:extLst>
           </p:cNvPr>
@@ -4227,42 +4381,6 @@
         </p:nvPicPr>
         <p:blipFill>
           <a:blip r:embed="rId2">
-            <a:extLst>
-              <a:ext uri="{28A0092B-C50C-407E-A947-70E740481C1C}">
-                <a14:useLocalDpi xmlns:a14="http://schemas.microsoft.com/office/drawing/2010/main" val="0"/>
-              </a:ext>
-            </a:extLst>
-          </a:blip>
-          <a:stretch>
-            <a:fillRect/>
-          </a:stretch>
-        </p:blipFill>
-        <p:spPr>
-          <a:xfrm>
-            <a:off x="0" y="2167517"/>
-            <a:ext cx="6400813" cy="3840488"/>
-          </a:xfrm>
-          <a:prstGeom prst="rect">
-            <a:avLst/>
-          </a:prstGeom>
-        </p:spPr>
-      </p:pic>
-      <p:pic>
-        <p:nvPicPr>
-          <p:cNvPr id="8" name="Picture 7">
-            <a:extLst>
-              <a:ext uri="{FF2B5EF4-FFF2-40B4-BE49-F238E27FC236}">
-                <a16:creationId xmlns:a16="http://schemas.microsoft.com/office/drawing/2014/main" id="{5A3F2B5B-248E-E063-7A52-A79905C346B8}"/>
-              </a:ext>
-            </a:extLst>
-          </p:cNvPr>
-          <p:cNvPicPr>
-            <a:picLocks noChangeAspect="1"/>
-          </p:cNvPicPr>
-          <p:nvPr/>
-        </p:nvPicPr>
-        <p:blipFill>
-          <a:blip r:embed="rId3">
             <a:extLst>
               <a:ext uri="{28A0092B-C50C-407E-A947-70E740481C1C}">
                 <a14:useLocalDpi xmlns:a14="http://schemas.microsoft.com/office/drawing/2010/main" val="0"/>
@@ -4277,6 +4395,42 @@
           <a:xfrm>
             <a:off x="6587607" y="2772202"/>
             <a:ext cx="5486411" cy="2926086"/>
+          </a:xfrm>
+          <a:prstGeom prst="rect">
+            <a:avLst/>
+          </a:prstGeom>
+        </p:spPr>
+      </p:pic>
+      <p:pic>
+        <p:nvPicPr>
+          <p:cNvPr id="4" name="Picture 3">
+            <a:extLst>
+              <a:ext uri="{FF2B5EF4-FFF2-40B4-BE49-F238E27FC236}">
+                <a16:creationId xmlns:a16="http://schemas.microsoft.com/office/drawing/2014/main" id="{41BC754C-9EA3-BDAB-B096-35DDABC48BC4}"/>
+              </a:ext>
+            </a:extLst>
+          </p:cNvPr>
+          <p:cNvPicPr>
+            <a:picLocks noChangeAspect="1"/>
+          </p:cNvPicPr>
+          <p:nvPr/>
+        </p:nvPicPr>
+        <p:blipFill>
+          <a:blip r:embed="rId3">
+            <a:extLst>
+              <a:ext uri="{28A0092B-C50C-407E-A947-70E740481C1C}">
+                <a14:useLocalDpi xmlns:a14="http://schemas.microsoft.com/office/drawing/2010/main" val="0"/>
+              </a:ext>
+            </a:extLst>
+          </a:blip>
+          <a:stretch>
+            <a:fillRect/>
+          </a:stretch>
+        </p:blipFill>
+        <p:spPr>
+          <a:xfrm>
+            <a:off x="0" y="2114812"/>
+            <a:ext cx="6400813" cy="3840488"/>
           </a:xfrm>
           <a:prstGeom prst="rect">
             <a:avLst/>
@@ -4301,6 +4455,145 @@
   <p:cSld>
     <p:spTree>
       <p:nvGrpSpPr>
+        <p:cNvPr id="1" name=""/>
+        <p:cNvGrpSpPr/>
+        <p:nvPr/>
+      </p:nvGrpSpPr>
+      <p:grpSpPr>
+        <a:xfrm>
+          <a:off x="0" y="0"/>
+          <a:ext cx="0" cy="0"/>
+          <a:chOff x="0" y="0"/>
+          <a:chExt cx="0" cy="0"/>
+        </a:xfrm>
+      </p:grpSpPr>
+      <p:sp>
+        <p:nvSpPr>
+          <p:cNvPr id="2" name="Title 1">
+            <a:extLst>
+              <a:ext uri="{FF2B5EF4-FFF2-40B4-BE49-F238E27FC236}">
+                <a16:creationId xmlns:a16="http://schemas.microsoft.com/office/drawing/2014/main" id="{103C1C32-D0C4-6B78-4C26-309946A12340}"/>
+              </a:ext>
+            </a:extLst>
+          </p:cNvPr>
+          <p:cNvSpPr>
+            <a:spLocks noGrp="1"/>
+          </p:cNvSpPr>
+          <p:nvPr>
+            <p:ph type="title"/>
+          </p:nvPr>
+        </p:nvSpPr>
+        <p:spPr/>
+        <p:txBody>
+          <a:bodyPr/>
+          <a:lstStyle/>
+          <a:p>
+            <a:r>
+              <a:rPr lang="en-US" dirty="0">
+                <a:solidFill>
+                  <a:srgbClr val="FF0000"/>
+                </a:solidFill>
+              </a:rPr>
+              <a:t>CD8 Tet+</a:t>
+            </a:r>
+            <a:endParaRPr lang="en-AU" dirty="0">
+              <a:solidFill>
+                <a:srgbClr val="FF0000"/>
+              </a:solidFill>
+            </a:endParaRPr>
+          </a:p>
+        </p:txBody>
+      </p:sp>
+      <p:pic>
+        <p:nvPicPr>
+          <p:cNvPr id="15" name="Picture 14">
+            <a:extLst>
+              <a:ext uri="{FF2B5EF4-FFF2-40B4-BE49-F238E27FC236}">
+                <a16:creationId xmlns:a16="http://schemas.microsoft.com/office/drawing/2014/main" id="{CC6812FA-66E8-9787-45FA-795B96F6AA78}"/>
+              </a:ext>
+            </a:extLst>
+          </p:cNvPr>
+          <p:cNvPicPr>
+            <a:picLocks noChangeAspect="1"/>
+          </p:cNvPicPr>
+          <p:nvPr/>
+        </p:nvPicPr>
+        <p:blipFill>
+          <a:blip r:embed="rId2">
+            <a:extLst>
+              <a:ext uri="{28A0092B-C50C-407E-A947-70E740481C1C}">
+                <a14:useLocalDpi xmlns:a14="http://schemas.microsoft.com/office/drawing/2010/main" val="0"/>
+              </a:ext>
+            </a:extLst>
+          </a:blip>
+          <a:stretch>
+            <a:fillRect/>
+          </a:stretch>
+        </p:blipFill>
+        <p:spPr>
+          <a:xfrm>
+            <a:off x="6705589" y="2378911"/>
+            <a:ext cx="5486411" cy="2926086"/>
+          </a:xfrm>
+          <a:prstGeom prst="rect">
+            <a:avLst/>
+          </a:prstGeom>
+        </p:spPr>
+      </p:pic>
+      <p:pic>
+        <p:nvPicPr>
+          <p:cNvPr id="10" name="Picture 9">
+            <a:extLst>
+              <a:ext uri="{FF2B5EF4-FFF2-40B4-BE49-F238E27FC236}">
+                <a16:creationId xmlns:a16="http://schemas.microsoft.com/office/drawing/2014/main" id="{5B102F21-FB7F-21B9-A1A5-A267B9AA7830}"/>
+              </a:ext>
+            </a:extLst>
+          </p:cNvPr>
+          <p:cNvPicPr>
+            <a:picLocks noChangeAspect="1"/>
+          </p:cNvPicPr>
+          <p:nvPr/>
+        </p:nvPicPr>
+        <p:blipFill>
+          <a:blip r:embed="rId3">
+            <a:extLst>
+              <a:ext uri="{28A0092B-C50C-407E-A947-70E740481C1C}">
+                <a14:useLocalDpi xmlns:a14="http://schemas.microsoft.com/office/drawing/2010/main" val="0"/>
+              </a:ext>
+            </a:extLst>
+          </a:blip>
+          <a:stretch>
+            <a:fillRect/>
+          </a:stretch>
+        </p:blipFill>
+        <p:spPr>
+          <a:xfrm>
+            <a:off x="0" y="1690688"/>
+            <a:ext cx="6400813" cy="3840488"/>
+          </a:xfrm>
+          <a:prstGeom prst="rect">
+            <a:avLst/>
+          </a:prstGeom>
+        </p:spPr>
+      </p:pic>
+    </p:spTree>
+    <p:extLst>
+      <p:ext uri="{BB962C8B-B14F-4D97-AF65-F5344CB8AC3E}">
+        <p14:creationId xmlns:p14="http://schemas.microsoft.com/office/powerpoint/2010/main" val="1685131050"/>
+      </p:ext>
+    </p:extLst>
+  </p:cSld>
+  <p:clrMapOvr>
+    <a:masterClrMapping/>
+  </p:clrMapOvr>
+</p:sld>
+</file>
+
+<file path=ppt/slides/slide3.xml><?xml version="1.0" encoding="utf-8"?>
+<p:sld xmlns:a="http://schemas.openxmlformats.org/drawingml/2006/main" xmlns:r="http://schemas.openxmlformats.org/officeDocument/2006/relationships" xmlns:p="http://schemas.openxmlformats.org/presentationml/2006/main">
+  <p:cSld>
+    <p:spTree>
+      <p:nvGrpSpPr>
         <p:cNvPr id="1" name="">
           <a:extLst>
             <a:ext uri="{FF2B5EF4-FFF2-40B4-BE49-F238E27FC236}">
@@ -4366,10 +4659,10 @@
       </p:sp>
       <p:pic>
         <p:nvPicPr>
-          <p:cNvPr id="5" name="Picture 4">
-            <a:extLst>
-              <a:ext uri="{FF2B5EF4-FFF2-40B4-BE49-F238E27FC236}">
-                <a16:creationId xmlns:a16="http://schemas.microsoft.com/office/drawing/2014/main" id="{D9F26B54-59F5-E2AF-413C-38B9249E54E1}"/>
+          <p:cNvPr id="8" name="Picture 7">
+            <a:extLst>
+              <a:ext uri="{FF2B5EF4-FFF2-40B4-BE49-F238E27FC236}">
+                <a16:creationId xmlns:a16="http://schemas.microsoft.com/office/drawing/2014/main" id="{D3077D13-F385-7D8F-E2D0-ED871FCD540D}"/>
               </a:ext>
             </a:extLst>
           </p:cNvPr>
@@ -4380,42 +4673,6 @@
         </p:nvPicPr>
         <p:blipFill>
           <a:blip r:embed="rId2">
-            <a:extLst>
-              <a:ext uri="{28A0092B-C50C-407E-A947-70E740481C1C}">
-                <a14:useLocalDpi xmlns:a14="http://schemas.microsoft.com/office/drawing/2010/main" val="0"/>
-              </a:ext>
-            </a:extLst>
-          </a:blip>
-          <a:stretch>
-            <a:fillRect/>
-          </a:stretch>
-        </p:blipFill>
-        <p:spPr>
-          <a:xfrm>
-            <a:off x="0" y="1941375"/>
-            <a:ext cx="6400813" cy="3840488"/>
-          </a:xfrm>
-          <a:prstGeom prst="rect">
-            <a:avLst/>
-          </a:prstGeom>
-        </p:spPr>
-      </p:pic>
-      <p:pic>
-        <p:nvPicPr>
-          <p:cNvPr id="8" name="Picture 7">
-            <a:extLst>
-              <a:ext uri="{FF2B5EF4-FFF2-40B4-BE49-F238E27FC236}">
-                <a16:creationId xmlns:a16="http://schemas.microsoft.com/office/drawing/2014/main" id="{D3077D13-F385-7D8F-E2D0-ED871FCD540D}"/>
-              </a:ext>
-            </a:extLst>
-          </p:cNvPr>
-          <p:cNvPicPr>
-            <a:picLocks noChangeAspect="1"/>
-          </p:cNvPicPr>
-          <p:nvPr/>
-        </p:nvPicPr>
-        <p:blipFill>
-          <a:blip r:embed="rId3">
             <a:extLst>
               <a:ext uri="{28A0092B-C50C-407E-A947-70E740481C1C}">
                 <a14:useLocalDpi xmlns:a14="http://schemas.microsoft.com/office/drawing/2010/main" val="0"/>
@@ -4430,6 +4687,42 @@
           <a:xfrm>
             <a:off x="6705589" y="2546060"/>
             <a:ext cx="5486411" cy="2926086"/>
+          </a:xfrm>
+          <a:prstGeom prst="rect">
+            <a:avLst/>
+          </a:prstGeom>
+        </p:spPr>
+      </p:pic>
+      <p:pic>
+        <p:nvPicPr>
+          <p:cNvPr id="7" name="Picture 6">
+            <a:extLst>
+              <a:ext uri="{FF2B5EF4-FFF2-40B4-BE49-F238E27FC236}">
+                <a16:creationId xmlns:a16="http://schemas.microsoft.com/office/drawing/2014/main" id="{755DC95D-4237-4E65-1280-D1E3038E5C2B}"/>
+              </a:ext>
+            </a:extLst>
+          </p:cNvPr>
+          <p:cNvPicPr>
+            <a:picLocks noChangeAspect="1"/>
+          </p:cNvPicPr>
+          <p:nvPr/>
+        </p:nvPicPr>
+        <p:blipFill>
+          <a:blip r:embed="rId3">
+            <a:extLst>
+              <a:ext uri="{28A0092B-C50C-407E-A947-70E740481C1C}">
+                <a14:useLocalDpi xmlns:a14="http://schemas.microsoft.com/office/drawing/2010/main" val="0"/>
+              </a:ext>
+            </a:extLst>
+          </a:blip>
+          <a:stretch>
+            <a:fillRect/>
+          </a:stretch>
+        </p:blipFill>
+        <p:spPr>
+          <a:xfrm>
+            <a:off x="0" y="1955323"/>
+            <a:ext cx="6400813" cy="3840488"/>
           </a:xfrm>
           <a:prstGeom prst="rect">
             <a:avLst/>
@@ -4449,7 +4742,7 @@
 </p:sld>
 </file>
 
-<file path=ppt/slides/slide3.xml><?xml version="1.0" encoding="utf-8"?>
+<file path=ppt/slides/slide4.xml><?xml version="1.0" encoding="utf-8"?>
 <p:sld xmlns:a="http://schemas.openxmlformats.org/drawingml/2006/main" xmlns:r="http://schemas.openxmlformats.org/officeDocument/2006/relationships" xmlns:p="http://schemas.openxmlformats.org/presentationml/2006/main">
   <p:cSld>
     <p:spTree>
@@ -4519,10 +4812,10 @@
       </p:sp>
       <p:pic>
         <p:nvPicPr>
-          <p:cNvPr id="5" name="Picture 4">
-            <a:extLst>
-              <a:ext uri="{FF2B5EF4-FFF2-40B4-BE49-F238E27FC236}">
-                <a16:creationId xmlns:a16="http://schemas.microsoft.com/office/drawing/2014/main" id="{83CF1E83-1073-419E-2BED-C9387421A4ED}"/>
+          <p:cNvPr id="8" name="Picture 7">
+            <a:extLst>
+              <a:ext uri="{FF2B5EF4-FFF2-40B4-BE49-F238E27FC236}">
+                <a16:creationId xmlns:a16="http://schemas.microsoft.com/office/drawing/2014/main" id="{9DBADF8D-B09D-661C-B988-D92F72E25A51}"/>
               </a:ext>
             </a:extLst>
           </p:cNvPr>
@@ -4533,42 +4826,6 @@
         </p:nvPicPr>
         <p:blipFill>
           <a:blip r:embed="rId2">
-            <a:extLst>
-              <a:ext uri="{28A0092B-C50C-407E-A947-70E740481C1C}">
-                <a14:useLocalDpi xmlns:a14="http://schemas.microsoft.com/office/drawing/2010/main" val="0"/>
-              </a:ext>
-            </a:extLst>
-          </a:blip>
-          <a:stretch>
-            <a:fillRect/>
-          </a:stretch>
-        </p:blipFill>
-        <p:spPr>
-          <a:xfrm>
-            <a:off x="0" y="1882382"/>
-            <a:ext cx="6400813" cy="3840488"/>
-          </a:xfrm>
-          <a:prstGeom prst="rect">
-            <a:avLst/>
-          </a:prstGeom>
-        </p:spPr>
-      </p:pic>
-      <p:pic>
-        <p:nvPicPr>
-          <p:cNvPr id="8" name="Picture 7">
-            <a:extLst>
-              <a:ext uri="{FF2B5EF4-FFF2-40B4-BE49-F238E27FC236}">
-                <a16:creationId xmlns:a16="http://schemas.microsoft.com/office/drawing/2014/main" id="{9DBADF8D-B09D-661C-B988-D92F72E25A51}"/>
-              </a:ext>
-            </a:extLst>
-          </p:cNvPr>
-          <p:cNvPicPr>
-            <a:picLocks noChangeAspect="1"/>
-          </p:cNvPicPr>
-          <p:nvPr/>
-        </p:nvPicPr>
-        <p:blipFill>
-          <a:blip r:embed="rId3">
             <a:extLst>
               <a:ext uri="{28A0092B-C50C-407E-A947-70E740481C1C}">
                 <a14:useLocalDpi xmlns:a14="http://schemas.microsoft.com/office/drawing/2010/main" val="0"/>
@@ -4583,6 +4840,42 @@
           <a:xfrm>
             <a:off x="6705589" y="2487066"/>
             <a:ext cx="5486411" cy="2926086"/>
+          </a:xfrm>
+          <a:prstGeom prst="rect">
+            <a:avLst/>
+          </a:prstGeom>
+        </p:spPr>
+      </p:pic>
+      <p:pic>
+        <p:nvPicPr>
+          <p:cNvPr id="7" name="Picture 6">
+            <a:extLst>
+              <a:ext uri="{FF2B5EF4-FFF2-40B4-BE49-F238E27FC236}">
+                <a16:creationId xmlns:a16="http://schemas.microsoft.com/office/drawing/2014/main" id="{45838D41-BCFC-24BA-B5C2-4DFA909F03A8}"/>
+              </a:ext>
+            </a:extLst>
+          </p:cNvPr>
+          <p:cNvPicPr>
+            <a:picLocks noChangeAspect="1"/>
+          </p:cNvPicPr>
+          <p:nvPr/>
+        </p:nvPicPr>
+        <p:blipFill>
+          <a:blip r:embed="rId3">
+            <a:extLst>
+              <a:ext uri="{28A0092B-C50C-407E-A947-70E740481C1C}">
+                <a14:useLocalDpi xmlns:a14="http://schemas.microsoft.com/office/drawing/2010/main" val="0"/>
+              </a:ext>
+            </a:extLst>
+          </a:blip>
+          <a:stretch>
+            <a:fillRect/>
+          </a:stretch>
+        </p:blipFill>
+        <p:spPr>
+          <a:xfrm>
+            <a:off x="0" y="1880895"/>
+            <a:ext cx="6400813" cy="3840488"/>
           </a:xfrm>
           <a:prstGeom prst="rect">
             <a:avLst/>
@@ -4602,7 +4895,7 @@
 </p:sld>
 </file>
 
-<file path=ppt/slides/slide4.xml><?xml version="1.0" encoding="utf-8"?>
+<file path=ppt/slides/slide5.xml><?xml version="1.0" encoding="utf-8"?>
 <p:sld xmlns:a="http://schemas.openxmlformats.org/drawingml/2006/main" xmlns:r="http://schemas.openxmlformats.org/officeDocument/2006/relationships" xmlns:p="http://schemas.openxmlformats.org/presentationml/2006/main">
   <p:cSld>
     <p:spTree>
@@ -4664,10 +4957,10 @@
       </p:sp>
       <p:pic>
         <p:nvPicPr>
-          <p:cNvPr id="8" name="Picture 7">
-            <a:extLst>
-              <a:ext uri="{FF2B5EF4-FFF2-40B4-BE49-F238E27FC236}">
-                <a16:creationId xmlns:a16="http://schemas.microsoft.com/office/drawing/2014/main" id="{7BF8893F-A964-A18D-526F-7C7E104481C1}"/>
+          <p:cNvPr id="12" name="Picture 11">
+            <a:extLst>
+              <a:ext uri="{FF2B5EF4-FFF2-40B4-BE49-F238E27FC236}">
+                <a16:creationId xmlns:a16="http://schemas.microsoft.com/office/drawing/2014/main" id="{D3FCFAC3-4C4D-1427-EEA4-24AF7DED5A48}"/>
               </a:ext>
             </a:extLst>
           </p:cNvPr>
@@ -4678,42 +4971,6 @@
         </p:nvPicPr>
         <p:blipFill>
           <a:blip r:embed="rId2">
-            <a:extLst>
-              <a:ext uri="{28A0092B-C50C-407E-A947-70E740481C1C}">
-                <a14:useLocalDpi xmlns:a14="http://schemas.microsoft.com/office/drawing/2010/main" val="0"/>
-              </a:ext>
-            </a:extLst>
-          </a:blip>
-          <a:stretch>
-            <a:fillRect/>
-          </a:stretch>
-        </p:blipFill>
-        <p:spPr>
-          <a:xfrm>
-            <a:off x="0" y="1892214"/>
-            <a:ext cx="6400813" cy="3840488"/>
-          </a:xfrm>
-          <a:prstGeom prst="rect">
-            <a:avLst/>
-          </a:prstGeom>
-        </p:spPr>
-      </p:pic>
-      <p:pic>
-        <p:nvPicPr>
-          <p:cNvPr id="12" name="Picture 11">
-            <a:extLst>
-              <a:ext uri="{FF2B5EF4-FFF2-40B4-BE49-F238E27FC236}">
-                <a16:creationId xmlns:a16="http://schemas.microsoft.com/office/drawing/2014/main" id="{D3FCFAC3-4C4D-1427-EEA4-24AF7DED5A48}"/>
-              </a:ext>
-            </a:extLst>
-          </p:cNvPr>
-          <p:cNvPicPr>
-            <a:picLocks noChangeAspect="1"/>
-          </p:cNvPicPr>
-          <p:nvPr/>
-        </p:nvPicPr>
-        <p:blipFill>
-          <a:blip r:embed="rId3">
             <a:extLst>
               <a:ext uri="{28A0092B-C50C-407E-A947-70E740481C1C}">
                 <a14:useLocalDpi xmlns:a14="http://schemas.microsoft.com/office/drawing/2010/main" val="0"/>
@@ -4728,6 +4985,42 @@
           <a:xfrm>
             <a:off x="6705589" y="2565725"/>
             <a:ext cx="5486411" cy="2926086"/>
+          </a:xfrm>
+          <a:prstGeom prst="rect">
+            <a:avLst/>
+          </a:prstGeom>
+        </p:spPr>
+      </p:pic>
+      <p:pic>
+        <p:nvPicPr>
+          <p:cNvPr id="6" name="Picture 5">
+            <a:extLst>
+              <a:ext uri="{FF2B5EF4-FFF2-40B4-BE49-F238E27FC236}">
+                <a16:creationId xmlns:a16="http://schemas.microsoft.com/office/drawing/2014/main" id="{9DAC988D-726F-13AF-BE92-EAE413959FCC}"/>
+              </a:ext>
+            </a:extLst>
+          </p:cNvPr>
+          <p:cNvPicPr>
+            <a:picLocks noChangeAspect="1"/>
+          </p:cNvPicPr>
+          <p:nvPr/>
+        </p:nvPicPr>
+        <p:blipFill>
+          <a:blip r:embed="rId3">
+            <a:extLst>
+              <a:ext uri="{28A0092B-C50C-407E-A947-70E740481C1C}">
+                <a14:useLocalDpi xmlns:a14="http://schemas.microsoft.com/office/drawing/2010/main" val="0"/>
+              </a:ext>
+            </a:extLst>
+          </a:blip>
+          <a:stretch>
+            <a:fillRect/>
+          </a:stretch>
+        </p:blipFill>
+        <p:spPr>
+          <a:xfrm>
+            <a:off x="0" y="1806468"/>
+            <a:ext cx="6400813" cy="3840488"/>
           </a:xfrm>
           <a:prstGeom prst="rect">
             <a:avLst/>
@@ -4747,7 +5040,7 @@
 </p:sld>
 </file>
 
-<file path=ppt/slides/slide5.xml><?xml version="1.0" encoding="utf-8"?>
+<file path=ppt/slides/slide6.xml><?xml version="1.0" encoding="utf-8"?>
 <p:sld xmlns:a="http://schemas.openxmlformats.org/drawingml/2006/main" xmlns:r="http://schemas.openxmlformats.org/officeDocument/2006/relationships" xmlns:p="http://schemas.openxmlformats.org/presentationml/2006/main">
   <p:cSld>
     <p:spTree>
@@ -4817,10 +5110,10 @@
       </p:sp>
       <p:pic>
         <p:nvPicPr>
-          <p:cNvPr id="16" name="Picture 15">
-            <a:extLst>
-              <a:ext uri="{FF2B5EF4-FFF2-40B4-BE49-F238E27FC236}">
-                <a16:creationId xmlns:a16="http://schemas.microsoft.com/office/drawing/2014/main" id="{39415A66-E444-1BFD-8039-FF0CCC8818B6}"/>
+          <p:cNvPr id="18" name="Picture 17">
+            <a:extLst>
+              <a:ext uri="{FF2B5EF4-FFF2-40B4-BE49-F238E27FC236}">
+                <a16:creationId xmlns:a16="http://schemas.microsoft.com/office/drawing/2014/main" id="{05086068-6E9F-CA39-02E9-149A5189C1BA}"/>
               </a:ext>
             </a:extLst>
           </p:cNvPr>
@@ -4831,42 +5124,6 @@
         </p:nvPicPr>
         <p:blipFill>
           <a:blip r:embed="rId2">
-            <a:extLst>
-              <a:ext uri="{28A0092B-C50C-407E-A947-70E740481C1C}">
-                <a14:useLocalDpi xmlns:a14="http://schemas.microsoft.com/office/drawing/2010/main" val="0"/>
-              </a:ext>
-            </a:extLst>
-          </a:blip>
-          <a:stretch>
-            <a:fillRect/>
-          </a:stretch>
-        </p:blipFill>
-        <p:spPr>
-          <a:xfrm>
-            <a:off x="0" y="1970873"/>
-            <a:ext cx="6400813" cy="3840488"/>
-          </a:xfrm>
-          <a:prstGeom prst="rect">
-            <a:avLst/>
-          </a:prstGeom>
-        </p:spPr>
-      </p:pic>
-      <p:pic>
-        <p:nvPicPr>
-          <p:cNvPr id="18" name="Picture 17">
-            <a:extLst>
-              <a:ext uri="{FF2B5EF4-FFF2-40B4-BE49-F238E27FC236}">
-                <a16:creationId xmlns:a16="http://schemas.microsoft.com/office/drawing/2014/main" id="{05086068-6E9F-CA39-02E9-149A5189C1BA}"/>
-              </a:ext>
-            </a:extLst>
-          </p:cNvPr>
-          <p:cNvPicPr>
-            <a:picLocks noChangeAspect="1"/>
-          </p:cNvPicPr>
-          <p:nvPr/>
-        </p:nvPicPr>
-        <p:blipFill>
-          <a:blip r:embed="rId3">
             <a:extLst>
               <a:ext uri="{28A0092B-C50C-407E-A947-70E740481C1C}">
                 <a14:useLocalDpi xmlns:a14="http://schemas.microsoft.com/office/drawing/2010/main" val="0"/>
@@ -4881,6 +5138,42 @@
           <a:xfrm>
             <a:off x="6521297" y="2603911"/>
             <a:ext cx="5486411" cy="2926086"/>
+          </a:xfrm>
+          <a:prstGeom prst="rect">
+            <a:avLst/>
+          </a:prstGeom>
+        </p:spPr>
+      </p:pic>
+      <p:pic>
+        <p:nvPicPr>
+          <p:cNvPr id="8" name="Picture 7">
+            <a:extLst>
+              <a:ext uri="{FF2B5EF4-FFF2-40B4-BE49-F238E27FC236}">
+                <a16:creationId xmlns:a16="http://schemas.microsoft.com/office/drawing/2014/main" id="{2BCF638D-1C7B-857D-1327-536FBDE64405}"/>
+              </a:ext>
+            </a:extLst>
+          </p:cNvPr>
+          <p:cNvPicPr>
+            <a:picLocks noChangeAspect="1"/>
+          </p:cNvPicPr>
+          <p:nvPr/>
+        </p:nvPicPr>
+        <p:blipFill>
+          <a:blip r:embed="rId3">
+            <a:extLst>
+              <a:ext uri="{28A0092B-C50C-407E-A947-70E740481C1C}">
+                <a14:useLocalDpi xmlns:a14="http://schemas.microsoft.com/office/drawing/2010/main" val="0"/>
+              </a:ext>
+            </a:extLst>
+          </a:blip>
+          <a:stretch>
+            <a:fillRect/>
+          </a:stretch>
+        </p:blipFill>
+        <p:spPr>
+          <a:xfrm>
+            <a:off x="0" y="1997854"/>
+            <a:ext cx="6400813" cy="3840488"/>
           </a:xfrm>
           <a:prstGeom prst="rect">
             <a:avLst/>
@@ -4900,7 +5193,7 @@
 </p:sld>
 </file>
 
-<file path=ppt/slides/slide6.xml><?xml version="1.0" encoding="utf-8"?>
+<file path=ppt/slides/slide7.xml><?xml version="1.0" encoding="utf-8"?>
 <p:sld xmlns:a="http://schemas.openxmlformats.org/drawingml/2006/main" xmlns:r="http://schemas.openxmlformats.org/officeDocument/2006/relationships" xmlns:p="http://schemas.openxmlformats.org/presentationml/2006/main">
   <p:cSld>
     <p:spTree>
@@ -4970,10 +5263,10 @@
       </p:sp>
       <p:pic>
         <p:nvPicPr>
-          <p:cNvPr id="12" name="Picture 11">
-            <a:extLst>
-              <a:ext uri="{FF2B5EF4-FFF2-40B4-BE49-F238E27FC236}">
-                <a16:creationId xmlns:a16="http://schemas.microsoft.com/office/drawing/2014/main" id="{52D467B7-E7B3-11BF-D050-C54F2E6D8F48}"/>
+          <p:cNvPr id="14" name="Picture 13">
+            <a:extLst>
+              <a:ext uri="{FF2B5EF4-FFF2-40B4-BE49-F238E27FC236}">
+                <a16:creationId xmlns:a16="http://schemas.microsoft.com/office/drawing/2014/main" id="{66F95643-8240-57CF-CF00-C8E5A9D665D6}"/>
               </a:ext>
             </a:extLst>
           </p:cNvPr>
@@ -4984,42 +5277,6 @@
         </p:nvPicPr>
         <p:blipFill>
           <a:blip r:embed="rId2">
-            <a:extLst>
-              <a:ext uri="{28A0092B-C50C-407E-A947-70E740481C1C}">
-                <a14:useLocalDpi xmlns:a14="http://schemas.microsoft.com/office/drawing/2010/main" val="0"/>
-              </a:ext>
-            </a:extLst>
-          </a:blip>
-          <a:stretch>
-            <a:fillRect/>
-          </a:stretch>
-        </p:blipFill>
-        <p:spPr>
-          <a:xfrm>
-            <a:off x="0" y="1955323"/>
-            <a:ext cx="6400813" cy="3840488"/>
-          </a:xfrm>
-          <a:prstGeom prst="rect">
-            <a:avLst/>
-          </a:prstGeom>
-        </p:spPr>
-      </p:pic>
-      <p:pic>
-        <p:nvPicPr>
-          <p:cNvPr id="14" name="Picture 13">
-            <a:extLst>
-              <a:ext uri="{FF2B5EF4-FFF2-40B4-BE49-F238E27FC236}">
-                <a16:creationId xmlns:a16="http://schemas.microsoft.com/office/drawing/2014/main" id="{66F95643-8240-57CF-CF00-C8E5A9D665D6}"/>
-              </a:ext>
-            </a:extLst>
-          </p:cNvPr>
-          <p:cNvPicPr>
-            <a:picLocks noChangeAspect="1"/>
-          </p:cNvPicPr>
-          <p:nvPr/>
-        </p:nvPicPr>
-        <p:blipFill>
-          <a:blip r:embed="rId3">
             <a:extLst>
               <a:ext uri="{28A0092B-C50C-407E-A947-70E740481C1C}">
                 <a14:useLocalDpi xmlns:a14="http://schemas.microsoft.com/office/drawing/2010/main" val="0"/>
@@ -5034,6 +5291,42 @@
           <a:xfrm>
             <a:off x="6563827" y="2540115"/>
             <a:ext cx="5486411" cy="2926086"/>
+          </a:xfrm>
+          <a:prstGeom prst="rect">
+            <a:avLst/>
+          </a:prstGeom>
+        </p:spPr>
+      </p:pic>
+      <p:pic>
+        <p:nvPicPr>
+          <p:cNvPr id="6" name="Picture 5">
+            <a:extLst>
+              <a:ext uri="{FF2B5EF4-FFF2-40B4-BE49-F238E27FC236}">
+                <a16:creationId xmlns:a16="http://schemas.microsoft.com/office/drawing/2014/main" id="{6AB5B0FF-5ADE-7B98-45BD-236059C0546E}"/>
+              </a:ext>
+            </a:extLst>
+          </p:cNvPr>
+          <p:cNvPicPr>
+            <a:picLocks noChangeAspect="1"/>
+          </p:cNvPicPr>
+          <p:nvPr/>
+        </p:nvPicPr>
+        <p:blipFill>
+          <a:blip r:embed="rId3">
+            <a:extLst>
+              <a:ext uri="{28A0092B-C50C-407E-A947-70E740481C1C}">
+                <a14:useLocalDpi xmlns:a14="http://schemas.microsoft.com/office/drawing/2010/main" val="0"/>
+              </a:ext>
+            </a:extLst>
+          </a:blip>
+          <a:stretch>
+            <a:fillRect/>
+          </a:stretch>
+        </p:blipFill>
+        <p:spPr>
+          <a:xfrm>
+            <a:off x="0" y="1955324"/>
+            <a:ext cx="6400813" cy="3840488"/>
           </a:xfrm>
           <a:prstGeom prst="rect">
             <a:avLst/>
@@ -5053,7 +5346,7 @@
 </p:sld>
 </file>
 
-<file path=ppt/slides/slide7.xml><?xml version="1.0" encoding="utf-8"?>
+<file path=ppt/slides/slide8.xml><?xml version="1.0" encoding="utf-8"?>
 <p:sld xmlns:a="http://schemas.openxmlformats.org/drawingml/2006/main" xmlns:r="http://schemas.openxmlformats.org/officeDocument/2006/relationships" xmlns:p="http://schemas.openxmlformats.org/presentationml/2006/main">
   <p:cSld>
     <p:spTree>
@@ -5123,10 +5416,10 @@
       </p:sp>
       <p:pic>
         <p:nvPicPr>
-          <p:cNvPr id="12" name="Picture 11">
-            <a:extLst>
-              <a:ext uri="{FF2B5EF4-FFF2-40B4-BE49-F238E27FC236}">
-                <a16:creationId xmlns:a16="http://schemas.microsoft.com/office/drawing/2014/main" id="{2ECD6DCA-1503-4F8E-35A8-2A3B888C2DDF}"/>
+          <p:cNvPr id="14" name="Picture 13">
+            <a:extLst>
+              <a:ext uri="{FF2B5EF4-FFF2-40B4-BE49-F238E27FC236}">
+                <a16:creationId xmlns:a16="http://schemas.microsoft.com/office/drawing/2014/main" id="{0172B6B9-EEED-9B1C-A090-D177FA8CBD8B}"/>
               </a:ext>
             </a:extLst>
           </p:cNvPr>
@@ -5137,42 +5430,6 @@
         </p:nvPicPr>
         <p:blipFill>
           <a:blip r:embed="rId2">
-            <a:extLst>
-              <a:ext uri="{28A0092B-C50C-407E-A947-70E740481C1C}">
-                <a14:useLocalDpi xmlns:a14="http://schemas.microsoft.com/office/drawing/2010/main" val="0"/>
-              </a:ext>
-            </a:extLst>
-          </a:blip>
-          <a:stretch>
-            <a:fillRect/>
-          </a:stretch>
-        </p:blipFill>
-        <p:spPr>
-          <a:xfrm>
-            <a:off x="0" y="2061649"/>
-            <a:ext cx="6400813" cy="3840488"/>
-          </a:xfrm>
-          <a:prstGeom prst="rect">
-            <a:avLst/>
-          </a:prstGeom>
-        </p:spPr>
-      </p:pic>
-      <p:pic>
-        <p:nvPicPr>
-          <p:cNvPr id="14" name="Picture 13">
-            <a:extLst>
-              <a:ext uri="{FF2B5EF4-FFF2-40B4-BE49-F238E27FC236}">
-                <a16:creationId xmlns:a16="http://schemas.microsoft.com/office/drawing/2014/main" id="{0172B6B9-EEED-9B1C-A090-D177FA8CBD8B}"/>
-              </a:ext>
-            </a:extLst>
-          </p:cNvPr>
-          <p:cNvPicPr>
-            <a:picLocks noChangeAspect="1"/>
-          </p:cNvPicPr>
-          <p:nvPr/>
-        </p:nvPicPr>
-        <p:blipFill>
-          <a:blip r:embed="rId3">
             <a:extLst>
               <a:ext uri="{28A0092B-C50C-407E-A947-70E740481C1C}">
                 <a14:useLocalDpi xmlns:a14="http://schemas.microsoft.com/office/drawing/2010/main" val="0"/>
@@ -5187,6 +5444,42 @@
           <a:xfrm>
             <a:off x="6595724" y="2688970"/>
             <a:ext cx="5486411" cy="2926086"/>
+          </a:xfrm>
+          <a:prstGeom prst="rect">
+            <a:avLst/>
+          </a:prstGeom>
+        </p:spPr>
+      </p:pic>
+      <p:pic>
+        <p:nvPicPr>
+          <p:cNvPr id="6" name="Picture 5">
+            <a:extLst>
+              <a:ext uri="{FF2B5EF4-FFF2-40B4-BE49-F238E27FC236}">
+                <a16:creationId xmlns:a16="http://schemas.microsoft.com/office/drawing/2014/main" id="{F19247CD-9B1A-103A-D6F2-924C26D34486}"/>
+              </a:ext>
+            </a:extLst>
+          </p:cNvPr>
+          <p:cNvPicPr>
+            <a:picLocks noChangeAspect="1"/>
+          </p:cNvPicPr>
+          <p:nvPr/>
+        </p:nvPicPr>
+        <p:blipFill>
+          <a:blip r:embed="rId3">
+            <a:extLst>
+              <a:ext uri="{28A0092B-C50C-407E-A947-70E740481C1C}">
+                <a14:useLocalDpi xmlns:a14="http://schemas.microsoft.com/office/drawing/2010/main" val="0"/>
+              </a:ext>
+            </a:extLst>
+          </a:blip>
+          <a:stretch>
+            <a:fillRect/>
+          </a:stretch>
+        </p:blipFill>
+        <p:spPr>
+          <a:xfrm>
+            <a:off x="0" y="1997853"/>
+            <a:ext cx="6400813" cy="3840488"/>
           </a:xfrm>
           <a:prstGeom prst="rect">
             <a:avLst/>
@@ -5206,7 +5499,7 @@
 </p:sld>
 </file>
 
-<file path=ppt/slides/slide8.xml><?xml version="1.0" encoding="utf-8"?>
+<file path=ppt/slides/slide9.xml><?xml version="1.0" encoding="utf-8"?>
 <p:sld xmlns:a="http://schemas.openxmlformats.org/drawingml/2006/main" xmlns:r="http://schemas.openxmlformats.org/officeDocument/2006/relationships" xmlns:p="http://schemas.openxmlformats.org/presentationml/2006/main">
   <p:cSld>
     <p:spTree>
@@ -5273,10 +5566,10 @@
       </p:sp>
       <p:pic>
         <p:nvPicPr>
-          <p:cNvPr id="10" name="Picture 9">
-            <a:extLst>
-              <a:ext uri="{FF2B5EF4-FFF2-40B4-BE49-F238E27FC236}">
-                <a16:creationId xmlns:a16="http://schemas.microsoft.com/office/drawing/2014/main" id="{D743A741-9343-A0D5-1841-DC86EDDF538C}"/>
+          <p:cNvPr id="12" name="Picture 11">
+            <a:extLst>
+              <a:ext uri="{FF2B5EF4-FFF2-40B4-BE49-F238E27FC236}">
+                <a16:creationId xmlns:a16="http://schemas.microsoft.com/office/drawing/2014/main" id="{F1731133-E97A-5B94-8015-89AFB77AF500}"/>
               </a:ext>
             </a:extLst>
           </p:cNvPr>
@@ -5287,42 +5580,6 @@
         </p:nvPicPr>
         <p:blipFill>
           <a:blip r:embed="rId2">
-            <a:extLst>
-              <a:ext uri="{28A0092B-C50C-407E-A947-70E740481C1C}">
-                <a14:useLocalDpi xmlns:a14="http://schemas.microsoft.com/office/drawing/2010/main" val="0"/>
-              </a:ext>
-            </a:extLst>
-          </a:blip>
-          <a:stretch>
-            <a:fillRect/>
-          </a:stretch>
-        </p:blipFill>
-        <p:spPr>
-          <a:xfrm>
-            <a:off x="0" y="1965956"/>
-            <a:ext cx="6400813" cy="3840488"/>
-          </a:xfrm>
-          <a:prstGeom prst="rect">
-            <a:avLst/>
-          </a:prstGeom>
-        </p:spPr>
-      </p:pic>
-      <p:pic>
-        <p:nvPicPr>
-          <p:cNvPr id="12" name="Picture 11">
-            <a:extLst>
-              <a:ext uri="{FF2B5EF4-FFF2-40B4-BE49-F238E27FC236}">
-                <a16:creationId xmlns:a16="http://schemas.microsoft.com/office/drawing/2014/main" id="{F1731133-E97A-5B94-8015-89AFB77AF500}"/>
-              </a:ext>
-            </a:extLst>
-          </p:cNvPr>
-          <p:cNvPicPr>
-            <a:picLocks noChangeAspect="1"/>
-          </p:cNvPicPr>
-          <p:nvPr/>
-        </p:nvPicPr>
-        <p:blipFill>
-          <a:blip r:embed="rId3">
             <a:extLst>
               <a:ext uri="{28A0092B-C50C-407E-A947-70E740481C1C}">
                 <a14:useLocalDpi xmlns:a14="http://schemas.microsoft.com/office/drawing/2010/main" val="0"/>
@@ -5343,109 +5600,12 @@
           </a:prstGeom>
         </p:spPr>
       </p:pic>
-    </p:spTree>
-    <p:extLst>
-      <p:ext uri="{BB962C8B-B14F-4D97-AF65-F5344CB8AC3E}">
-        <p14:creationId xmlns:p14="http://schemas.microsoft.com/office/powerpoint/2010/main" val="2532531059"/>
-      </p:ext>
-    </p:extLst>
-  </p:cSld>
-  <p:clrMapOvr>
-    <a:masterClrMapping/>
-  </p:clrMapOvr>
-</p:sld>
-</file>
-
-<file path=ppt/slides/slide9.xml><?xml version="1.0" encoding="utf-8"?>
-<p:sld xmlns:a="http://schemas.openxmlformats.org/drawingml/2006/main" xmlns:r="http://schemas.openxmlformats.org/officeDocument/2006/relationships" xmlns:p="http://schemas.openxmlformats.org/presentationml/2006/main">
-  <p:cSld>
-    <p:spTree>
-      <p:nvGrpSpPr>
-        <p:cNvPr id="1" name="">
-          <a:extLst>
-            <a:ext uri="{FF2B5EF4-FFF2-40B4-BE49-F238E27FC236}">
-              <a16:creationId xmlns:a16="http://schemas.microsoft.com/office/drawing/2014/main" id="{6F944B98-8647-75C5-E2BF-60C0F4C685F9}"/>
-            </a:ext>
-          </a:extLst>
-        </p:cNvPr>
-        <p:cNvGrpSpPr/>
-        <p:nvPr/>
-      </p:nvGrpSpPr>
-      <p:grpSpPr>
-        <a:xfrm>
-          <a:off x="0" y="0"/>
-          <a:ext cx="0" cy="0"/>
-          <a:chOff x="0" y="0"/>
-          <a:chExt cx="0" cy="0"/>
-        </a:xfrm>
-      </p:grpSpPr>
-      <p:sp>
-        <p:nvSpPr>
-          <p:cNvPr id="2" name="Title 1">
-            <a:extLst>
-              <a:ext uri="{FF2B5EF4-FFF2-40B4-BE49-F238E27FC236}">
-                <a16:creationId xmlns:a16="http://schemas.microsoft.com/office/drawing/2014/main" id="{662F47B6-03EA-D3B8-D16C-2F821E1A357B}"/>
-              </a:ext>
-            </a:extLst>
-          </p:cNvPr>
-          <p:cNvSpPr>
-            <a:spLocks noGrp="1"/>
-          </p:cNvSpPr>
-          <p:nvPr>
-            <p:ph type="title"/>
-          </p:nvPr>
-        </p:nvSpPr>
-        <p:spPr/>
-        <p:txBody>
-          <a:bodyPr/>
-          <a:lstStyle/>
-          <a:p>
-            <a:r>
-              <a:rPr lang="en-AU" dirty="0">
-                <a:solidFill>
-                  <a:srgbClr val="00B050"/>
-                </a:solidFill>
-              </a:rPr>
-              <a:t>CD4 </a:t>
-            </a:r>
-            <a:r>
-              <a:rPr lang="en-AU" dirty="0" err="1">
-                <a:solidFill>
-                  <a:srgbClr val="00B050"/>
-                </a:solidFill>
-              </a:rPr>
-              <a:t>tet</a:t>
-            </a:r>
-            <a:r>
-              <a:rPr lang="en-AU" dirty="0">
-                <a:solidFill>
-                  <a:srgbClr val="00B050"/>
-                </a:solidFill>
-              </a:rPr>
-              <a:t>+ Ly6C FOXP3 </a:t>
-            </a:r>
-            <a:r>
-              <a:rPr lang="en-AU" dirty="0" err="1">
-                <a:solidFill>
-                  <a:srgbClr val="00B050"/>
-                </a:solidFill>
-              </a:rPr>
-              <a:t>Teff_cells</a:t>
-            </a:r>
-            <a:endParaRPr lang="en-AU" dirty="0">
-              <a:solidFill>
-                <a:srgbClr val="00B050"/>
-              </a:solidFill>
-            </a:endParaRPr>
-          </a:p>
-        </p:txBody>
-      </p:sp>
       <p:pic>
         <p:nvPicPr>
-          <p:cNvPr id="14" name="Picture 13">
-            <a:extLst>
-              <a:ext uri="{FF2B5EF4-FFF2-40B4-BE49-F238E27FC236}">
-                <a16:creationId xmlns:a16="http://schemas.microsoft.com/office/drawing/2014/main" id="{2AE98082-AACD-147E-334A-0AD7436530B6}"/>
+          <p:cNvPr id="4" name="Picture 3">
+            <a:extLst>
+              <a:ext uri="{FF2B5EF4-FFF2-40B4-BE49-F238E27FC236}">
+                <a16:creationId xmlns:a16="http://schemas.microsoft.com/office/drawing/2014/main" id="{8D64825B-2F86-D8BA-326B-3CE74C84A069}"/>
               </a:ext>
             </a:extLst>
           </p:cNvPr>
@@ -5455,7 +5615,7 @@
           <p:nvPr/>
         </p:nvPicPr>
         <p:blipFill>
-          <a:blip r:embed="rId2">
+          <a:blip r:embed="rId3">
             <a:extLst>
               <a:ext uri="{28A0092B-C50C-407E-A947-70E740481C1C}">
                 <a14:useLocalDpi xmlns:a14="http://schemas.microsoft.com/office/drawing/2010/main" val="0"/>
@@ -5468,44 +5628,8 @@
         </p:blipFill>
         <p:spPr>
           <a:xfrm>
-            <a:off x="0" y="1976588"/>
+            <a:off x="0" y="2199872"/>
             <a:ext cx="6400813" cy="3840488"/>
-          </a:xfrm>
-          <a:prstGeom prst="rect">
-            <a:avLst/>
-          </a:prstGeom>
-        </p:spPr>
-      </p:pic>
-      <p:pic>
-        <p:nvPicPr>
-          <p:cNvPr id="16" name="Picture 15">
-            <a:extLst>
-              <a:ext uri="{FF2B5EF4-FFF2-40B4-BE49-F238E27FC236}">
-                <a16:creationId xmlns:a16="http://schemas.microsoft.com/office/drawing/2014/main" id="{F319E17D-BA0F-135A-0CAB-745F695BC067}"/>
-              </a:ext>
-            </a:extLst>
-          </p:cNvPr>
-          <p:cNvPicPr>
-            <a:picLocks noChangeAspect="1"/>
-          </p:cNvPicPr>
-          <p:nvPr/>
-        </p:nvPicPr>
-        <p:blipFill>
-          <a:blip r:embed="rId3">
-            <a:extLst>
-              <a:ext uri="{28A0092B-C50C-407E-A947-70E740481C1C}">
-                <a14:useLocalDpi xmlns:a14="http://schemas.microsoft.com/office/drawing/2010/main" val="0"/>
-              </a:ext>
-            </a:extLst>
-          </a:blip>
-          <a:stretch>
-            <a:fillRect/>
-          </a:stretch>
-        </p:blipFill>
-        <p:spPr>
-          <a:xfrm>
-            <a:off x="6585091" y="2603911"/>
-            <a:ext cx="5486411" cy="2926086"/>
           </a:xfrm>
           <a:prstGeom prst="rect">
             <a:avLst/>
@@ -5515,7 +5639,7 @@
     </p:spTree>
     <p:extLst>
       <p:ext uri="{BB962C8B-B14F-4D97-AF65-F5344CB8AC3E}">
-        <p14:creationId xmlns:p14="http://schemas.microsoft.com/office/powerpoint/2010/main" val="1450115306"/>
+        <p14:creationId xmlns:p14="http://schemas.microsoft.com/office/powerpoint/2010/main" val="2532531059"/>
       </p:ext>
     </p:extLst>
   </p:cSld>

--- a/T cell decay slopes.pptx
+++ b/T cell decay slopes.pptx
@@ -275,7 +275,7 @@
           <a:p>
             <a:fld id="{B163C8C7-CBCA-4667-931A-6DAEBDCEF4E5}" type="datetimeFigureOut">
               <a:rPr lang="en-AU" smtClean="0"/>
-              <a:t>12/10/2026</a:t>
+              <a:t>14/10/2026</a:t>
             </a:fld>
             <a:endParaRPr lang="en-AU"/>
           </a:p>
@@ -475,7 +475,7 @@
           <a:p>
             <a:fld id="{B163C8C7-CBCA-4667-931A-6DAEBDCEF4E5}" type="datetimeFigureOut">
               <a:rPr lang="en-AU" smtClean="0"/>
-              <a:t>12/10/2026</a:t>
+              <a:t>14/10/2026</a:t>
             </a:fld>
             <a:endParaRPr lang="en-AU"/>
           </a:p>
@@ -685,7 +685,7 @@
           <a:p>
             <a:fld id="{B163C8C7-CBCA-4667-931A-6DAEBDCEF4E5}" type="datetimeFigureOut">
               <a:rPr lang="en-AU" smtClean="0"/>
-              <a:t>12/10/2026</a:t>
+              <a:t>14/10/2026</a:t>
             </a:fld>
             <a:endParaRPr lang="en-AU"/>
           </a:p>
@@ -885,7 +885,7 @@
           <a:p>
             <a:fld id="{B163C8C7-CBCA-4667-931A-6DAEBDCEF4E5}" type="datetimeFigureOut">
               <a:rPr lang="en-AU" smtClean="0"/>
-              <a:t>12/10/2026</a:t>
+              <a:t>14/10/2026</a:t>
             </a:fld>
             <a:endParaRPr lang="en-AU"/>
           </a:p>
@@ -1161,7 +1161,7 @@
           <a:p>
             <a:fld id="{B163C8C7-CBCA-4667-931A-6DAEBDCEF4E5}" type="datetimeFigureOut">
               <a:rPr lang="en-AU" smtClean="0"/>
-              <a:t>12/10/2026</a:t>
+              <a:t>14/10/2026</a:t>
             </a:fld>
             <a:endParaRPr lang="en-AU"/>
           </a:p>
@@ -1429,7 +1429,7 @@
           <a:p>
             <a:fld id="{B163C8C7-CBCA-4667-931A-6DAEBDCEF4E5}" type="datetimeFigureOut">
               <a:rPr lang="en-AU" smtClean="0"/>
-              <a:t>12/10/2026</a:t>
+              <a:t>14/10/2026</a:t>
             </a:fld>
             <a:endParaRPr lang="en-AU"/>
           </a:p>
@@ -1844,7 +1844,7 @@
           <a:p>
             <a:fld id="{B163C8C7-CBCA-4667-931A-6DAEBDCEF4E5}" type="datetimeFigureOut">
               <a:rPr lang="en-AU" smtClean="0"/>
-              <a:t>12/10/2026</a:t>
+              <a:t>14/10/2026</a:t>
             </a:fld>
             <a:endParaRPr lang="en-AU"/>
           </a:p>
@@ -1986,7 +1986,7 @@
           <a:p>
             <a:fld id="{B163C8C7-CBCA-4667-931A-6DAEBDCEF4E5}" type="datetimeFigureOut">
               <a:rPr lang="en-AU" smtClean="0"/>
-              <a:t>12/10/2026</a:t>
+              <a:t>14/10/2026</a:t>
             </a:fld>
             <a:endParaRPr lang="en-AU"/>
           </a:p>
@@ -2099,7 +2099,7 @@
           <a:p>
             <a:fld id="{B163C8C7-CBCA-4667-931A-6DAEBDCEF4E5}" type="datetimeFigureOut">
               <a:rPr lang="en-AU" smtClean="0"/>
-              <a:t>12/10/2026</a:t>
+              <a:t>14/10/2026</a:t>
             </a:fld>
             <a:endParaRPr lang="en-AU"/>
           </a:p>
@@ -2412,7 +2412,7 @@
           <a:p>
             <a:fld id="{B163C8C7-CBCA-4667-931A-6DAEBDCEF4E5}" type="datetimeFigureOut">
               <a:rPr lang="en-AU" smtClean="0"/>
-              <a:t>12/10/2026</a:t>
+              <a:t>14/10/2026</a:t>
             </a:fld>
             <a:endParaRPr lang="en-AU"/>
           </a:p>
@@ -2701,7 +2701,7 @@
           <a:p>
             <a:fld id="{B163C8C7-CBCA-4667-931A-6DAEBDCEF4E5}" type="datetimeFigureOut">
               <a:rPr lang="en-AU" smtClean="0"/>
-              <a:t>12/10/2026</a:t>
+              <a:t>14/10/2026</a:t>
             </a:fld>
             <a:endParaRPr lang="en-AU"/>
           </a:p>
@@ -2944,7 +2944,7 @@
           <a:p>
             <a:fld id="{B163C8C7-CBCA-4667-931A-6DAEBDCEF4E5}" type="datetimeFigureOut">
               <a:rPr lang="en-AU" smtClean="0"/>
-              <a:t>12/10/2026</a:t>
+              <a:t>14/10/2026</a:t>
             </a:fld>
             <a:endParaRPr lang="en-AU"/>
           </a:p>
@@ -3753,10 +3753,10 @@
       </p:pic>
       <p:pic>
         <p:nvPicPr>
-          <p:cNvPr id="5" name="Picture 4">
-            <a:extLst>
-              <a:ext uri="{FF2B5EF4-FFF2-40B4-BE49-F238E27FC236}">
-                <a16:creationId xmlns:a16="http://schemas.microsoft.com/office/drawing/2014/main" id="{6DF6E8ED-B1BE-BF3B-9481-74BC1FB7A093}"/>
+          <p:cNvPr id="4" name="Picture 3">
+            <a:extLst>
+              <a:ext uri="{FF2B5EF4-FFF2-40B4-BE49-F238E27FC236}">
+                <a16:creationId xmlns:a16="http://schemas.microsoft.com/office/drawing/2014/main" id="{CA408870-EC2A-CDDF-4ACF-7A34050242DE}"/>
               </a:ext>
             </a:extLst>
           </p:cNvPr>
@@ -3779,7 +3779,7 @@
         </p:blipFill>
         <p:spPr>
           <a:xfrm>
-            <a:off x="0" y="2136077"/>
+            <a:off x="0" y="2098691"/>
             <a:ext cx="6400813" cy="3840488"/>
           </a:xfrm>
           <a:prstGeom prst="rect">
@@ -4091,10 +4091,10 @@
       </p:pic>
       <p:pic>
         <p:nvPicPr>
-          <p:cNvPr id="5" name="Picture 4">
-            <a:extLst>
-              <a:ext uri="{FF2B5EF4-FFF2-40B4-BE49-F238E27FC236}">
-                <a16:creationId xmlns:a16="http://schemas.microsoft.com/office/drawing/2014/main" id="{F145E942-59BE-6D8B-3F82-29BB3FC8EEBD}"/>
+          <p:cNvPr id="10" name="Picture 9">
+            <a:extLst>
+              <a:ext uri="{FF2B5EF4-FFF2-40B4-BE49-F238E27FC236}">
+                <a16:creationId xmlns:a16="http://schemas.microsoft.com/office/drawing/2014/main" id="{F47498B0-67DB-716E-429E-B3E14ED2C06F}"/>
               </a:ext>
             </a:extLst>
           </p:cNvPr>
@@ -4117,7 +4117,7 @@
         </p:blipFill>
         <p:spPr>
           <a:xfrm>
-            <a:off x="0" y="2236343"/>
+            <a:off x="0" y="2125444"/>
             <a:ext cx="6400813" cy="3840488"/>
           </a:xfrm>
           <a:prstGeom prst="rect">
@@ -4247,10 +4247,10 @@
       </p:pic>
       <p:pic>
         <p:nvPicPr>
-          <p:cNvPr id="5" name="Picture 4">
-            <a:extLst>
-              <a:ext uri="{FF2B5EF4-FFF2-40B4-BE49-F238E27FC236}">
-                <a16:creationId xmlns:a16="http://schemas.microsoft.com/office/drawing/2014/main" id="{999664D8-3F1E-A59F-2A10-F521C1ACADF7}"/>
+          <p:cNvPr id="4" name="Picture 3">
+            <a:extLst>
+              <a:ext uri="{FF2B5EF4-FFF2-40B4-BE49-F238E27FC236}">
+                <a16:creationId xmlns:a16="http://schemas.microsoft.com/office/drawing/2014/main" id="{DC882302-7D1F-BE4F-7A97-D434C145F79C}"/>
               </a:ext>
             </a:extLst>
           </p:cNvPr>
@@ -4273,7 +4273,7 @@
         </p:blipFill>
         <p:spPr>
           <a:xfrm>
-            <a:off x="0" y="2104179"/>
+            <a:off x="0" y="2275672"/>
             <a:ext cx="6400813" cy="3840488"/>
           </a:xfrm>
           <a:prstGeom prst="rect">
@@ -4542,10 +4542,10 @@
       </p:pic>
       <p:pic>
         <p:nvPicPr>
-          <p:cNvPr id="10" name="Picture 9">
-            <a:extLst>
-              <a:ext uri="{FF2B5EF4-FFF2-40B4-BE49-F238E27FC236}">
-                <a16:creationId xmlns:a16="http://schemas.microsoft.com/office/drawing/2014/main" id="{5B102F21-FB7F-21B9-A1A5-A267B9AA7830}"/>
+          <p:cNvPr id="8" name="Picture 7">
+            <a:extLst>
+              <a:ext uri="{FF2B5EF4-FFF2-40B4-BE49-F238E27FC236}">
+                <a16:creationId xmlns:a16="http://schemas.microsoft.com/office/drawing/2014/main" id="{9EA77FB5-CC62-807F-10AF-CB7442084B3D}"/>
               </a:ext>
             </a:extLst>
           </p:cNvPr>
@@ -4695,10 +4695,10 @@
       </p:pic>
       <p:pic>
         <p:nvPicPr>
-          <p:cNvPr id="7" name="Picture 6">
-            <a:extLst>
-              <a:ext uri="{FF2B5EF4-FFF2-40B4-BE49-F238E27FC236}">
-                <a16:creationId xmlns:a16="http://schemas.microsoft.com/office/drawing/2014/main" id="{755DC95D-4237-4E65-1280-D1E3038E5C2B}"/>
+          <p:cNvPr id="6" name="Picture 5">
+            <a:extLst>
+              <a:ext uri="{FF2B5EF4-FFF2-40B4-BE49-F238E27FC236}">
+                <a16:creationId xmlns:a16="http://schemas.microsoft.com/office/drawing/2014/main" id="{3BADE7F9-0032-CBBB-B932-72AF51248E7F}"/>
               </a:ext>
             </a:extLst>
           </p:cNvPr>
@@ -4721,7 +4721,7 @@
         </p:blipFill>
         <p:spPr>
           <a:xfrm>
-            <a:off x="0" y="1955323"/>
+            <a:off x="0" y="1872549"/>
             <a:ext cx="6400813" cy="3840488"/>
           </a:xfrm>
           <a:prstGeom prst="rect">
@@ -4848,10 +4848,10 @@
       </p:pic>
       <p:pic>
         <p:nvPicPr>
-          <p:cNvPr id="7" name="Picture 6">
-            <a:extLst>
-              <a:ext uri="{FF2B5EF4-FFF2-40B4-BE49-F238E27FC236}">
-                <a16:creationId xmlns:a16="http://schemas.microsoft.com/office/drawing/2014/main" id="{45838D41-BCFC-24BA-B5C2-4DFA909F03A8}"/>
+          <p:cNvPr id="6" name="Picture 5">
+            <a:extLst>
+              <a:ext uri="{FF2B5EF4-FFF2-40B4-BE49-F238E27FC236}">
+                <a16:creationId xmlns:a16="http://schemas.microsoft.com/office/drawing/2014/main" id="{51A7DB97-C8ED-3322-B2F1-13AD06CE0103}"/>
               </a:ext>
             </a:extLst>
           </p:cNvPr>
@@ -4874,7 +4874,7 @@
         </p:blipFill>
         <p:spPr>
           <a:xfrm>
-            <a:off x="0" y="1880895"/>
+            <a:off x="0" y="1902047"/>
             <a:ext cx="6400813" cy="3840488"/>
           </a:xfrm>
           <a:prstGeom prst="rect">
@@ -4993,10 +4993,10 @@
       </p:pic>
       <p:pic>
         <p:nvPicPr>
-          <p:cNvPr id="6" name="Picture 5">
-            <a:extLst>
-              <a:ext uri="{FF2B5EF4-FFF2-40B4-BE49-F238E27FC236}">
-                <a16:creationId xmlns:a16="http://schemas.microsoft.com/office/drawing/2014/main" id="{9DAC988D-726F-13AF-BE92-EAE413959FCC}"/>
+          <p:cNvPr id="9" name="Picture 8">
+            <a:extLst>
+              <a:ext uri="{FF2B5EF4-FFF2-40B4-BE49-F238E27FC236}">
+                <a16:creationId xmlns:a16="http://schemas.microsoft.com/office/drawing/2014/main" id="{479F0A59-AC10-16D1-4DE6-6E2751595BF2}"/>
               </a:ext>
             </a:extLst>
           </p:cNvPr>
@@ -5019,7 +5019,7 @@
         </p:blipFill>
         <p:spPr>
           <a:xfrm>
-            <a:off x="0" y="1806468"/>
+            <a:off x="0" y="1912793"/>
             <a:ext cx="6400813" cy="3840488"/>
           </a:xfrm>
           <a:prstGeom prst="rect">
@@ -5146,10 +5146,10 @@
       </p:pic>
       <p:pic>
         <p:nvPicPr>
-          <p:cNvPr id="8" name="Picture 7">
-            <a:extLst>
-              <a:ext uri="{FF2B5EF4-FFF2-40B4-BE49-F238E27FC236}">
-                <a16:creationId xmlns:a16="http://schemas.microsoft.com/office/drawing/2014/main" id="{2BCF638D-1C7B-857D-1327-536FBDE64405}"/>
+          <p:cNvPr id="9" name="Picture 8">
+            <a:extLst>
+              <a:ext uri="{FF2B5EF4-FFF2-40B4-BE49-F238E27FC236}">
+                <a16:creationId xmlns:a16="http://schemas.microsoft.com/office/drawing/2014/main" id="{07050CEE-7261-A854-9B5A-BCB9516BC5A0}"/>
               </a:ext>
             </a:extLst>
           </p:cNvPr>
@@ -5172,7 +5172,7 @@
         </p:blipFill>
         <p:spPr>
           <a:xfrm>
-            <a:off x="0" y="1997854"/>
+            <a:off x="0" y="1965956"/>
             <a:ext cx="6400813" cy="3840488"/>
           </a:xfrm>
           <a:prstGeom prst="rect">
@@ -5299,10 +5299,10 @@
       </p:pic>
       <p:pic>
         <p:nvPicPr>
-          <p:cNvPr id="6" name="Picture 5">
-            <a:extLst>
-              <a:ext uri="{FF2B5EF4-FFF2-40B4-BE49-F238E27FC236}">
-                <a16:creationId xmlns:a16="http://schemas.microsoft.com/office/drawing/2014/main" id="{6AB5B0FF-5ADE-7B98-45BD-236059C0546E}"/>
+          <p:cNvPr id="9" name="Picture 8">
+            <a:extLst>
+              <a:ext uri="{FF2B5EF4-FFF2-40B4-BE49-F238E27FC236}">
+                <a16:creationId xmlns:a16="http://schemas.microsoft.com/office/drawing/2014/main" id="{9C787A8B-8387-7E91-C0F5-9F02B4288848}"/>
               </a:ext>
             </a:extLst>
           </p:cNvPr>
@@ -5325,7 +5325,7 @@
         </p:blipFill>
         <p:spPr>
           <a:xfrm>
-            <a:off x="0" y="1955324"/>
+            <a:off x="0" y="2082914"/>
             <a:ext cx="6400813" cy="3840488"/>
           </a:xfrm>
           <a:prstGeom prst="rect">
@@ -5452,10 +5452,10 @@
       </p:pic>
       <p:pic>
         <p:nvPicPr>
-          <p:cNvPr id="6" name="Picture 5">
-            <a:extLst>
-              <a:ext uri="{FF2B5EF4-FFF2-40B4-BE49-F238E27FC236}">
-                <a16:creationId xmlns:a16="http://schemas.microsoft.com/office/drawing/2014/main" id="{F19247CD-9B1A-103A-D6F2-924C26D34486}"/>
+          <p:cNvPr id="4" name="Picture 3">
+            <a:extLst>
+              <a:ext uri="{FF2B5EF4-FFF2-40B4-BE49-F238E27FC236}">
+                <a16:creationId xmlns:a16="http://schemas.microsoft.com/office/drawing/2014/main" id="{E7B86EF0-C9F3-7ADE-7386-1EC192214F98}"/>
               </a:ext>
             </a:extLst>
           </p:cNvPr>
@@ -5478,7 +5478,7 @@
         </p:blipFill>
         <p:spPr>
           <a:xfrm>
-            <a:off x="0" y="1997853"/>
+            <a:off x="0" y="2059363"/>
             <a:ext cx="6400813" cy="3840488"/>
           </a:xfrm>
           <a:prstGeom prst="rect">
